--- a/apps/web/public/wormhole/decks/03-11-2026-costa-rica-early-bird.pptx
+++ b/apps/web/public/wormhole/decks/03-11-2026-costa-rica-early-bird.pptx
@@ -9,6 +9,8 @@
     <p:sldId id="257" r:id="rId8"/>
     <p:sldId id="258" r:id="rId9"/>
     <p:sldId id="259" r:id="rId10"/>
+    <p:sldId id="260" r:id="rId11"/>
+    <p:sldId id="261" r:id="rId12"/>
   </p:sldIdLst>
   <p:sldSz cx="10287000" cy="12858750" type="screen4x3"/>
   <p:notesSz cx="6858000" cy="9144000"/>
@@ -108,6 +110,806 @@
     </a:lvl9pPr>
   </p:defaultTextStyle>
 </p:presentation>
+</file>
+
+<file path=ppt/notesMasters/notesMaster1.xml><?xml version="1.0" encoding="utf-8"?>
+<p:notesMaster xmlns:a="http://schemas.openxmlformats.org/drawingml/2006/main" xmlns:p="http://schemas.openxmlformats.org/presentationml/2006/main" xmlns:r="http://schemas.openxmlformats.org/officeDocument/2006/relationships">
+  <p:cSld>
+    <p:bg>
+      <p:bgRef idx="1001">
+        <a:schemeClr val="bg1"/>
+      </p:bgRef>
+    </p:bg>
+    <p:spTree>
+      <p:nvGrpSpPr>
+        <p:cNvPr id="1" name=""/>
+        <p:cNvGrpSpPr/>
+        <p:nvPr/>
+      </p:nvGrpSpPr>
+      <p:grpSpPr>
+        <a:xfrm>
+          <a:off x="0" y="0"/>
+          <a:ext cx="0" cy="0"/>
+          <a:chOff x="0" y="0"/>
+          <a:chExt cx="0" cy="0"/>
+        </a:xfrm>
+      </p:grpSpPr>
+      <p:sp>
+        <p:nvSpPr>
+          <p:cNvPr id="2" name="Header Placeholder 1"/>
+          <p:cNvSpPr>
+            <a:spLocks noGrp="1"/>
+          </p:cNvSpPr>
+          <p:nvPr>
+            <p:ph type="hdr" sz="quarter"/>
+          </p:nvPr>
+        </p:nvSpPr>
+        <p:spPr>
+          <a:xfrm>
+            <a:off x="0" y="0"/>
+            <a:ext cx="2971800" cy="457200"/>
+          </a:xfrm>
+          <a:prstGeom prst="rect">
+            <a:avLst/>
+          </a:prstGeom>
+        </p:spPr>
+        <p:txBody>
+          <a:bodyPr vert="horz" lIns="91440" tIns="45720" rIns="91440" bIns="45720" rtlCol="0"/>
+          <a:lstStyle>
+            <a:lvl1pPr algn="l">
+              <a:defRPr sz="1200"/>
+            </a:lvl1pPr>
+          </a:lstStyle>
+          <a:p>
+            <a:endParaRPr lang="en-US"/>
+          </a:p>
+        </p:txBody>
+      </p:sp>
+      <p:sp>
+        <p:nvSpPr>
+          <p:cNvPr id="3" name="Date Placeholder 2"/>
+          <p:cNvSpPr>
+            <a:spLocks noGrp="1"/>
+          </p:cNvSpPr>
+          <p:nvPr>
+            <p:ph type="dt" idx="1"/>
+          </p:nvPr>
+        </p:nvSpPr>
+        <p:spPr>
+          <a:xfrm>
+            <a:off x="3884613" y="0"/>
+            <a:ext cx="2971800" cy="457200"/>
+          </a:xfrm>
+          <a:prstGeom prst="rect">
+            <a:avLst/>
+          </a:prstGeom>
+        </p:spPr>
+        <p:txBody>
+          <a:bodyPr vert="horz" lIns="91440" tIns="45720" rIns="91440" bIns="45720" rtlCol="0"/>
+          <a:lstStyle>
+            <a:lvl1pPr algn="r">
+              <a:defRPr sz="1200"/>
+            </a:lvl1pPr>
+          </a:lstStyle>
+          <a:p>
+            <a:fld id="{0F89C1C7-3DCD-1040-A9CF-14679D8B5DDD}" type="datetimeFigureOut">
+              <a:rPr lang="en-US" smtClean="0"/>
+              <a:t>10/17/16</a:t>
+            </a:fld>
+            <a:endParaRPr lang="en-US"/>
+          </a:p>
+        </p:txBody>
+      </p:sp>
+      <p:sp>
+        <p:nvSpPr>
+          <p:cNvPr id="4" name="Slide Image Placeholder 3"/>
+          <p:cNvSpPr>
+            <a:spLocks noGrp="1" noRot="1" noChangeAspect="1"/>
+          </p:cNvSpPr>
+          <p:nvPr>
+            <p:ph type="sldImg" idx="2"/>
+          </p:nvPr>
+        </p:nvSpPr>
+        <p:spPr>
+          <a:xfrm>
+            <a:off x="1143000" y="685800"/>
+            <a:ext cx="4572000" cy="3429000"/>
+          </a:xfrm>
+          <a:prstGeom prst="rect">
+            <a:avLst/>
+          </a:prstGeom>
+          <a:noFill/>
+          <a:ln w="12700">
+            <a:solidFill>
+              <a:prstClr val="black"/>
+            </a:solidFill>
+          </a:ln>
+        </p:spPr>
+        <p:txBody>
+          <a:bodyPr vert="horz" lIns="91440" tIns="45720" rIns="91440" bIns="45720" rtlCol="0" anchor="ctr"/>
+          <a:lstStyle/>
+          <a:p>
+            <a:endParaRPr lang="en-US"/>
+          </a:p>
+        </p:txBody>
+      </p:sp>
+      <p:sp>
+        <p:nvSpPr>
+          <p:cNvPr id="5" name="Notes Placeholder 4"/>
+          <p:cNvSpPr>
+            <a:spLocks noGrp="1"/>
+          </p:cNvSpPr>
+          <p:nvPr>
+            <p:ph type="body" sz="quarter" idx="3"/>
+          </p:nvPr>
+        </p:nvSpPr>
+        <p:spPr>
+          <a:xfrm>
+            <a:off x="685800" y="4343400"/>
+            <a:ext cx="5486400" cy="4114800"/>
+          </a:xfrm>
+          <a:prstGeom prst="rect">
+            <a:avLst/>
+          </a:prstGeom>
+        </p:spPr>
+        <p:txBody>
+          <a:bodyPr vert="horz" lIns="91440" tIns="45720" rIns="91440" bIns="45720" rtlCol="0"/>
+          <a:lstStyle/>
+          <a:p>
+            <a:pPr lvl="0"/>
+            <a:r>
+              <a:rPr lang="en-US" smtClean="0"/>
+              <a:t>Click to edit Master text styles</a:t>
+            </a:r>
+          </a:p>
+          <a:p>
+            <a:pPr lvl="1"/>
+            <a:r>
+              <a:rPr lang="en-US" smtClean="0"/>
+              <a:t>Second level</a:t>
+            </a:r>
+          </a:p>
+          <a:p>
+            <a:pPr lvl="2"/>
+            <a:r>
+              <a:rPr lang="en-US" smtClean="0"/>
+              <a:t>Third level</a:t>
+            </a:r>
+          </a:p>
+          <a:p>
+            <a:pPr lvl="3"/>
+            <a:r>
+              <a:rPr lang="en-US" smtClean="0"/>
+              <a:t>Fourth level</a:t>
+            </a:r>
+          </a:p>
+          <a:p>
+            <a:pPr lvl="4"/>
+            <a:r>
+              <a:rPr lang="en-US" smtClean="0"/>
+              <a:t>Fifth level</a:t>
+            </a:r>
+            <a:endParaRPr lang="en-US"/>
+          </a:p>
+        </p:txBody>
+      </p:sp>
+      <p:sp>
+        <p:nvSpPr>
+          <p:cNvPr id="6" name="Footer Placeholder 5"/>
+          <p:cNvSpPr>
+            <a:spLocks noGrp="1"/>
+          </p:cNvSpPr>
+          <p:nvPr>
+            <p:ph type="ftr" sz="quarter" idx="4"/>
+          </p:nvPr>
+        </p:nvSpPr>
+        <p:spPr>
+          <a:xfrm>
+            <a:off x="0" y="8685213"/>
+            <a:ext cx="2971800" cy="457200"/>
+          </a:xfrm>
+          <a:prstGeom prst="rect">
+            <a:avLst/>
+          </a:prstGeom>
+        </p:spPr>
+        <p:txBody>
+          <a:bodyPr vert="horz" lIns="91440" tIns="45720" rIns="91440" bIns="45720" rtlCol="0" anchor="b"/>
+          <a:lstStyle>
+            <a:lvl1pPr algn="l">
+              <a:defRPr sz="1200"/>
+            </a:lvl1pPr>
+          </a:lstStyle>
+          <a:p>
+            <a:endParaRPr lang="en-US"/>
+          </a:p>
+        </p:txBody>
+      </p:sp>
+      <p:sp>
+        <p:nvSpPr>
+          <p:cNvPr id="7" name="Slide Number Placeholder 6"/>
+          <p:cNvSpPr>
+            <a:spLocks noGrp="1"/>
+          </p:cNvSpPr>
+          <p:nvPr>
+            <p:ph type="sldNum" sz="quarter" idx="5"/>
+          </p:nvPr>
+        </p:nvSpPr>
+        <p:spPr>
+          <a:xfrm>
+            <a:off x="3884613" y="8685213"/>
+            <a:ext cx="2971800" cy="457200"/>
+          </a:xfrm>
+          <a:prstGeom prst="rect">
+            <a:avLst/>
+          </a:prstGeom>
+        </p:spPr>
+        <p:txBody>
+          <a:bodyPr vert="horz" lIns="91440" tIns="45720" rIns="91440" bIns="45720" rtlCol="0" anchor="b"/>
+          <a:lstStyle>
+            <a:lvl1pPr algn="r">
+              <a:defRPr sz="1200"/>
+            </a:lvl1pPr>
+          </a:lstStyle>
+          <a:p>
+            <a:fld id="{BB5E49A5-4136-284D-997B-48E1D791AD67}" type="slidenum">
+              <a:rPr lang="en-US" smtClean="0"/>
+              <a:t>‹#›</a:t>
+            </a:fld>
+            <a:endParaRPr lang="en-US"/>
+          </a:p>
+        </p:txBody>
+      </p:sp>
+    </p:spTree>
+    <p:extLst>
+      <p:ext uri="{BB962C8B-B14F-4D97-AF65-F5344CB8AC3E}">
+        <p14:creationId xmlns:p14="http://schemas.microsoft.com/office/powerpoint/2010/main" val="2623252185"/>
+      </p:ext>
+    </p:extLst>
+  </p:cSld>
+  <p:clrMap bg1="lt1" tx1="dk1" bg2="lt2" tx2="dk2" accent1="accent1" accent2="accent2" accent3="accent3" accent4="accent4" accent5="accent5" accent6="accent6" hlink="hlink" folHlink="folHlink"/>
+  <p:notesStyle>
+    <a:lvl1pPr marL="0" algn="l" defTabSz="457200" rtl="0" eaLnBrk="1" latinLnBrk="0" hangingPunct="1">
+      <a:defRPr sz="1200" kern="1200">
+        <a:solidFill>
+          <a:schemeClr val="tx1"/>
+        </a:solidFill>
+        <a:latin typeface="+mn-lt"/>
+        <a:ea typeface="+mn-ea"/>
+        <a:cs typeface="+mn-cs"/>
+      </a:defRPr>
+    </a:lvl1pPr>
+    <a:lvl2pPr marL="457200" algn="l" defTabSz="457200" rtl="0" eaLnBrk="1" latinLnBrk="0" hangingPunct="1">
+      <a:defRPr sz="1200" kern="1200">
+        <a:solidFill>
+          <a:schemeClr val="tx1"/>
+        </a:solidFill>
+        <a:latin typeface="+mn-lt"/>
+        <a:ea typeface="+mn-ea"/>
+        <a:cs typeface="+mn-cs"/>
+      </a:defRPr>
+    </a:lvl2pPr>
+    <a:lvl3pPr marL="914400" algn="l" defTabSz="457200" rtl="0" eaLnBrk="1" latinLnBrk="0" hangingPunct="1">
+      <a:defRPr sz="1200" kern="1200">
+        <a:solidFill>
+          <a:schemeClr val="tx1"/>
+        </a:solidFill>
+        <a:latin typeface="+mn-lt"/>
+        <a:ea typeface="+mn-ea"/>
+        <a:cs typeface="+mn-cs"/>
+      </a:defRPr>
+    </a:lvl3pPr>
+    <a:lvl4pPr marL="1371600" algn="l" defTabSz="457200" rtl="0" eaLnBrk="1" latinLnBrk="0" hangingPunct="1">
+      <a:defRPr sz="1200" kern="1200">
+        <a:solidFill>
+          <a:schemeClr val="tx1"/>
+        </a:solidFill>
+        <a:latin typeface="+mn-lt"/>
+        <a:ea typeface="+mn-ea"/>
+        <a:cs typeface="+mn-cs"/>
+      </a:defRPr>
+    </a:lvl4pPr>
+    <a:lvl5pPr marL="1828800" algn="l" defTabSz="457200" rtl="0" eaLnBrk="1" latinLnBrk="0" hangingPunct="1">
+      <a:defRPr sz="1200" kern="1200">
+        <a:solidFill>
+          <a:schemeClr val="tx1"/>
+        </a:solidFill>
+        <a:latin typeface="+mn-lt"/>
+        <a:ea typeface="+mn-ea"/>
+        <a:cs typeface="+mn-cs"/>
+      </a:defRPr>
+    </a:lvl5pPr>
+    <a:lvl6pPr marL="2286000" algn="l" defTabSz="457200" rtl="0" eaLnBrk="1" latinLnBrk="0" hangingPunct="1">
+      <a:defRPr sz="1200" kern="1200">
+        <a:solidFill>
+          <a:schemeClr val="tx1"/>
+        </a:solidFill>
+        <a:latin typeface="+mn-lt"/>
+        <a:ea typeface="+mn-ea"/>
+        <a:cs typeface="+mn-cs"/>
+      </a:defRPr>
+    </a:lvl6pPr>
+    <a:lvl7pPr marL="2743200" algn="l" defTabSz="457200" rtl="0" eaLnBrk="1" latinLnBrk="0" hangingPunct="1">
+      <a:defRPr sz="1200" kern="1200">
+        <a:solidFill>
+          <a:schemeClr val="tx1"/>
+        </a:solidFill>
+        <a:latin typeface="+mn-lt"/>
+        <a:ea typeface="+mn-ea"/>
+        <a:cs typeface="+mn-cs"/>
+      </a:defRPr>
+    </a:lvl7pPr>
+    <a:lvl8pPr marL="3200400" algn="l" defTabSz="457200" rtl="0" eaLnBrk="1" latinLnBrk="0" hangingPunct="1">
+      <a:defRPr sz="1200" kern="1200">
+        <a:solidFill>
+          <a:schemeClr val="tx1"/>
+        </a:solidFill>
+        <a:latin typeface="+mn-lt"/>
+        <a:ea typeface="+mn-ea"/>
+        <a:cs typeface="+mn-cs"/>
+      </a:defRPr>
+    </a:lvl8pPr>
+    <a:lvl9pPr marL="3657600" algn="l" defTabSz="457200" rtl="0" eaLnBrk="1" latinLnBrk="0" hangingPunct="1">
+      <a:defRPr sz="1200" kern="1200">
+        <a:solidFill>
+          <a:schemeClr val="tx1"/>
+        </a:solidFill>
+        <a:latin typeface="+mn-lt"/>
+        <a:ea typeface="+mn-ea"/>
+        <a:cs typeface="+mn-cs"/>
+      </a:defRPr>
+    </a:lvl9pPr>
+  </p:notesStyle>
+</p:notesMaster>
+</file>
+
+<file path=ppt/notesSlides/notesSlide1.xml><?xml version="1.0" encoding="utf-8"?>
+<p:notes xmlns:a="http://schemas.openxmlformats.org/drawingml/2006/main" xmlns:p="http://schemas.openxmlformats.org/presentationml/2006/main" xmlns:r="http://schemas.openxmlformats.org/officeDocument/2006/relationships">
+  <p:cSld>
+    <p:spTree>
+      <p:nvGrpSpPr>
+        <p:cNvPr id="1" name=""/>
+        <p:cNvGrpSpPr/>
+        <p:nvPr/>
+      </p:nvGrpSpPr>
+      <p:grpSpPr>
+        <a:xfrm>
+          <a:off x="0" y="0"/>
+          <a:ext cx="0" cy="0"/>
+          <a:chOff x="0" y="0"/>
+          <a:chExt cx="0" cy="0"/>
+        </a:xfrm>
+      </p:grpSpPr>
+      <p:sp>
+        <p:nvSpPr>
+          <p:cNvPr id="2" name="Slide Image Placeholder 1"/>
+          <p:cNvSpPr>
+            <a:spLocks noGrp="1"/>
+          </p:cNvSpPr>
+          <p:nvPr>
+            <p:ph type="sldImg" idx="2"/>
+          </p:nvPr>
+        </p:nvSpPr>
+        <p:spPr/>
+      </p:sp>
+      <p:sp>
+        <p:nvSpPr>
+          <p:cNvPr id="3" name="Notes Placeholder 2"/>
+          <p:cNvSpPr>
+            <a:spLocks noGrp="1"/>
+          </p:cNvSpPr>
+          <p:nvPr>
+            <p:ph type="body" idx="3" sz="quarter"/>
+          </p:nvPr>
+        </p:nvSpPr>
+        <p:spPr/>
+        <p:txBody>
+          <a:bodyPr/>
+          <a:lstStyle/>
+          <a:p>
+            <a:r>
+              <a:t>Photo: IMG_4534.HEIC</a:t>
+            </a:r>
+          </a:p>
+          <a:p>
+            <a:r>
+              <a:t>Costa Rica Oct 2025, Armonía: laughing around the wire mesh bin with a thermometer</a:t>
+            </a:r>
+          </a:p>
+        </p:txBody>
+      </p:sp>
+      <p:sp>
+        <p:nvSpPr>
+          <p:cNvPr id="4" name="Slide Number Placeholder 3"/>
+          <p:cNvSpPr>
+            <a:spLocks noGrp="1"/>
+          </p:cNvSpPr>
+          <p:nvPr>
+            <p:ph type="sldNum" idx="5" sz="quarter"/>
+          </p:nvPr>
+        </p:nvSpPr>
+        <p:spPr/>
+      </p:sp>
+    </p:spTree>
+  </p:cSld>
+  <p:clrMapOvr>
+    <a:masterClrMapping/>
+  </p:clrMapOvr>
+</p:notes>
+</file>
+
+<file path=ppt/notesSlides/notesSlide2.xml><?xml version="1.0" encoding="utf-8"?>
+<p:notes xmlns:a="http://schemas.openxmlformats.org/drawingml/2006/main" xmlns:p="http://schemas.openxmlformats.org/presentationml/2006/main" xmlns:r="http://schemas.openxmlformats.org/officeDocument/2006/relationships">
+  <p:cSld>
+    <p:spTree>
+      <p:nvGrpSpPr>
+        <p:cNvPr id="1" name=""/>
+        <p:cNvGrpSpPr/>
+        <p:nvPr/>
+      </p:nvGrpSpPr>
+      <p:grpSpPr>
+        <a:xfrm>
+          <a:off x="0" y="0"/>
+          <a:ext cx="0" cy="0"/>
+          <a:chOff x="0" y="0"/>
+          <a:chExt cx="0" cy="0"/>
+        </a:xfrm>
+      </p:grpSpPr>
+      <p:sp>
+        <p:nvSpPr>
+          <p:cNvPr id="2" name="Slide Image Placeholder 1"/>
+          <p:cNvSpPr>
+            <a:spLocks noGrp="1"/>
+          </p:cNvSpPr>
+          <p:nvPr>
+            <p:ph type="sldImg" idx="2"/>
+          </p:nvPr>
+        </p:nvSpPr>
+        <p:spPr/>
+      </p:sp>
+      <p:sp>
+        <p:nvSpPr>
+          <p:cNvPr id="3" name="Notes Placeholder 2"/>
+          <p:cNvSpPr>
+            <a:spLocks noGrp="1"/>
+          </p:cNvSpPr>
+          <p:nvPr>
+            <p:ph type="body" idx="3" sz="quarter"/>
+          </p:nvPr>
+        </p:nvSpPr>
+        <p:spPr/>
+        <p:txBody>
+          <a:bodyPr/>
+          <a:lstStyle/>
+          <a:p>
+            <a:r>
+              <a:t>Photo: PXL_20251022_151710920.MP.jpg</a:t>
+            </a:r>
+          </a:p>
+          <a:p>
+            <a:r>
+              <a:t>Costa Rica Oct 2025, Armonía: wide view of the shed, several teams building at once</a:t>
+            </a:r>
+          </a:p>
+        </p:txBody>
+      </p:sp>
+      <p:sp>
+        <p:nvSpPr>
+          <p:cNvPr id="4" name="Slide Number Placeholder 3"/>
+          <p:cNvSpPr>
+            <a:spLocks noGrp="1"/>
+          </p:cNvSpPr>
+          <p:nvPr>
+            <p:ph type="sldNum" idx="5" sz="quarter"/>
+          </p:nvPr>
+        </p:nvSpPr>
+        <p:spPr/>
+      </p:sp>
+    </p:spTree>
+  </p:cSld>
+  <p:clrMapOvr>
+    <a:masterClrMapping/>
+  </p:clrMapOvr>
+</p:notes>
+</file>
+
+<file path=ppt/notesSlides/notesSlide3.xml><?xml version="1.0" encoding="utf-8"?>
+<p:notes xmlns:a="http://schemas.openxmlformats.org/drawingml/2006/main" xmlns:p="http://schemas.openxmlformats.org/presentationml/2006/main" xmlns:r="http://schemas.openxmlformats.org/officeDocument/2006/relationships">
+  <p:cSld>
+    <p:spTree>
+      <p:nvGrpSpPr>
+        <p:cNvPr id="1" name=""/>
+        <p:cNvGrpSpPr/>
+        <p:nvPr/>
+      </p:nvGrpSpPr>
+      <p:grpSpPr>
+        <a:xfrm>
+          <a:off x="0" y="0"/>
+          <a:ext cx="0" cy="0"/>
+          <a:chOff x="0" y="0"/>
+          <a:chExt cx="0" cy="0"/>
+        </a:xfrm>
+      </p:grpSpPr>
+      <p:sp>
+        <p:nvSpPr>
+          <p:cNvPr id="2" name="Slide Image Placeholder 1"/>
+          <p:cNvSpPr>
+            <a:spLocks noGrp="1"/>
+          </p:cNvSpPr>
+          <p:nvPr>
+            <p:ph type="sldImg" idx="2"/>
+          </p:nvPr>
+        </p:nvSpPr>
+        <p:spPr/>
+      </p:sp>
+      <p:sp>
+        <p:nvSpPr>
+          <p:cNvPr id="3" name="Notes Placeholder 2"/>
+          <p:cNvSpPr>
+            <a:spLocks noGrp="1"/>
+          </p:cNvSpPr>
+          <p:nvPr>
+            <p:ph type="body" idx="3" sz="quarter"/>
+          </p:nvPr>
+        </p:nvSpPr>
+        <p:spPr/>
+        <p:txBody>
+          <a:bodyPr/>
+          <a:lstStyle/>
+          <a:p>
+            <a:r>
+              <a:t>Photo: PXL_20240716_224324982_HandsInSoil.jpg</a:t>
+            </a:r>
+          </a:p>
+          <a:p>
+            <a:r>
+              <a:t>Costa Rica Jul 2024, Armonía: hands in woody compost (HandsInSoil)</a:t>
+            </a:r>
+          </a:p>
+        </p:txBody>
+      </p:sp>
+      <p:sp>
+        <p:nvSpPr>
+          <p:cNvPr id="4" name="Slide Number Placeholder 3"/>
+          <p:cNvSpPr>
+            <a:spLocks noGrp="1"/>
+          </p:cNvSpPr>
+          <p:nvPr>
+            <p:ph type="sldNum" idx="5" sz="quarter"/>
+          </p:nvPr>
+        </p:nvSpPr>
+        <p:spPr/>
+      </p:sp>
+    </p:spTree>
+  </p:cSld>
+  <p:clrMapOvr>
+    <a:masterClrMapping/>
+  </p:clrMapOvr>
+</p:notes>
+</file>
+
+<file path=ppt/notesSlides/notesSlide4.xml><?xml version="1.0" encoding="utf-8"?>
+<p:notes xmlns:a="http://schemas.openxmlformats.org/drawingml/2006/main" xmlns:p="http://schemas.openxmlformats.org/presentationml/2006/main" xmlns:r="http://schemas.openxmlformats.org/officeDocument/2006/relationships">
+  <p:cSld>
+    <p:spTree>
+      <p:nvGrpSpPr>
+        <p:cNvPr id="1" name=""/>
+        <p:cNvGrpSpPr/>
+        <p:nvPr/>
+      </p:nvGrpSpPr>
+      <p:grpSpPr>
+        <a:xfrm>
+          <a:off x="0" y="0"/>
+          <a:ext cx="0" cy="0"/>
+          <a:chOff x="0" y="0"/>
+          <a:chExt cx="0" cy="0"/>
+        </a:xfrm>
+      </p:grpSpPr>
+      <p:sp>
+        <p:nvSpPr>
+          <p:cNvPr id="2" name="Slide Image Placeholder 1"/>
+          <p:cNvSpPr>
+            <a:spLocks noGrp="1"/>
+          </p:cNvSpPr>
+          <p:nvPr>
+            <p:ph type="sldImg" idx="2"/>
+          </p:nvPr>
+        </p:nvSpPr>
+        <p:spPr/>
+      </p:sp>
+      <p:sp>
+        <p:nvSpPr>
+          <p:cNvPr id="3" name="Notes Placeholder 2"/>
+          <p:cNvSpPr>
+            <a:spLocks noGrp="1"/>
+          </p:cNvSpPr>
+          <p:nvPr>
+            <p:ph type="body" idx="3" sz="quarter"/>
+          </p:nvPr>
+        </p:nvSpPr>
+        <p:spPr/>
+        <p:txBody>
+          <a:bodyPr/>
+          <a:lstStyle/>
+          <a:p>
+            <a:r>
+              <a:t>Photo: PXL_20251020_222404850.jpg + Compost_Tea_Prep.jpg</a:t>
+            </a:r>
+          </a:p>
+          <a:p>
+            <a:r>
+              <a:t>Costa Rica Oct 2025: frothy brew in the blue tub (top); Costa Rica Jul 2024: Compost Tea Prep bucket brewer (bottom)</a:t>
+            </a:r>
+          </a:p>
+        </p:txBody>
+      </p:sp>
+      <p:sp>
+        <p:nvSpPr>
+          <p:cNvPr id="4" name="Slide Number Placeholder 3"/>
+          <p:cNvSpPr>
+            <a:spLocks noGrp="1"/>
+          </p:cNvSpPr>
+          <p:nvPr>
+            <p:ph type="sldNum" idx="5" sz="quarter"/>
+          </p:nvPr>
+        </p:nvSpPr>
+        <p:spPr/>
+      </p:sp>
+    </p:spTree>
+  </p:cSld>
+  <p:clrMapOvr>
+    <a:masterClrMapping/>
+  </p:clrMapOvr>
+</p:notes>
+</file>
+
+<file path=ppt/notesSlides/notesSlide5.xml><?xml version="1.0" encoding="utf-8"?>
+<p:notes xmlns:a="http://schemas.openxmlformats.org/drawingml/2006/main" xmlns:p="http://schemas.openxmlformats.org/presentationml/2006/main" xmlns:r="http://schemas.openxmlformats.org/officeDocument/2006/relationships">
+  <p:cSld>
+    <p:spTree>
+      <p:nvGrpSpPr>
+        <p:cNvPr id="1" name=""/>
+        <p:cNvGrpSpPr/>
+        <p:nvPr/>
+      </p:nvGrpSpPr>
+      <p:grpSpPr>
+        <a:xfrm>
+          <a:off x="0" y="0"/>
+          <a:ext cx="0" cy="0"/>
+          <a:chOff x="0" y="0"/>
+          <a:chExt cx="0" cy="0"/>
+        </a:xfrm>
+      </p:grpSpPr>
+      <p:sp>
+        <p:nvSpPr>
+          <p:cNvPr id="2" name="Slide Image Placeholder 1"/>
+          <p:cNvSpPr>
+            <a:spLocks noGrp="1"/>
+          </p:cNvSpPr>
+          <p:nvPr>
+            <p:ph type="sldImg" idx="2"/>
+          </p:nvPr>
+        </p:nvSpPr>
+        <p:spPr/>
+      </p:sp>
+      <p:sp>
+        <p:nvSpPr>
+          <p:cNvPr id="3" name="Notes Placeholder 2"/>
+          <p:cNvSpPr>
+            <a:spLocks noGrp="1"/>
+          </p:cNvSpPr>
+          <p:nvPr>
+            <p:ph type="body" idx="3" sz="quarter"/>
+          </p:nvPr>
+        </p:nvSpPr>
+        <p:spPr/>
+        <p:txBody>
+          <a:bodyPr/>
+          <a:lstStyle/>
+          <a:p>
+            <a:r>
+              <a:t>Photo: PXL_20251023_191907277.jpg</a:t>
+            </a:r>
+          </a:p>
+          <a:p>
+            <a:r>
+              <a:t>Costa Rica Oct 2025, Armonía: class watching live microscopy on screen (Drive ID 1YTuACdcqtVqv99HAArkRDlBUYdnCP8KZ), brightened</a:t>
+            </a:r>
+          </a:p>
+        </p:txBody>
+      </p:sp>
+      <p:sp>
+        <p:nvSpPr>
+          <p:cNvPr id="4" name="Slide Number Placeholder 3"/>
+          <p:cNvSpPr>
+            <a:spLocks noGrp="1"/>
+          </p:cNvSpPr>
+          <p:nvPr>
+            <p:ph type="sldNum" idx="5" sz="quarter"/>
+          </p:nvPr>
+        </p:nvSpPr>
+        <p:spPr/>
+      </p:sp>
+    </p:spTree>
+  </p:cSld>
+  <p:clrMapOvr>
+    <a:masterClrMapping/>
+  </p:clrMapOvr>
+</p:notes>
+</file>
+
+<file path=ppt/notesSlides/notesSlide6.xml><?xml version="1.0" encoding="utf-8"?>
+<p:notes xmlns:a="http://schemas.openxmlformats.org/drawingml/2006/main" xmlns:p="http://schemas.openxmlformats.org/presentationml/2006/main" xmlns:r="http://schemas.openxmlformats.org/officeDocument/2006/relationships">
+  <p:cSld>
+    <p:spTree>
+      <p:nvGrpSpPr>
+        <p:cNvPr id="1" name=""/>
+        <p:cNvGrpSpPr/>
+        <p:nvPr/>
+      </p:nvGrpSpPr>
+      <p:grpSpPr>
+        <a:xfrm>
+          <a:off x="0" y="0"/>
+          <a:ext cx="0" cy="0"/>
+          <a:chOff x="0" y="0"/>
+          <a:chExt cx="0" cy="0"/>
+        </a:xfrm>
+      </p:grpSpPr>
+      <p:sp>
+        <p:nvSpPr>
+          <p:cNvPr id="2" name="Slide Image Placeholder 1"/>
+          <p:cNvSpPr>
+            <a:spLocks noGrp="1"/>
+          </p:cNvSpPr>
+          <p:nvPr>
+            <p:ph type="sldImg" idx="2"/>
+          </p:nvPr>
+        </p:nvSpPr>
+        <p:spPr/>
+      </p:sp>
+      <p:sp>
+        <p:nvSpPr>
+          <p:cNvPr id="3" name="Notes Placeholder 2"/>
+          <p:cNvSpPr>
+            <a:spLocks noGrp="1"/>
+          </p:cNvSpPr>
+          <p:nvPr>
+            <p:ph type="body" idx="3" sz="quarter"/>
+          </p:nvPr>
+        </p:nvSpPr>
+        <p:spPr/>
+        <p:txBody>
+          <a:bodyPr/>
+          <a:lstStyle/>
+          <a:p>
+            <a:r>
+              <a:t>Photo: PXL_20251022_172210012.jpg</a:t>
+            </a:r>
+          </a:p>
+          <a:p>
+            <a:r>
+              <a:t>Costa Rica Oct 2025, Armonía: the class under the big tree in the forest</a:t>
+            </a:r>
+          </a:p>
+        </p:txBody>
+      </p:sp>
+      <p:sp>
+        <p:nvSpPr>
+          <p:cNvPr id="4" name="Slide Number Placeholder 3"/>
+          <p:cNvSpPr>
+            <a:spLocks noGrp="1"/>
+          </p:cNvSpPr>
+          <p:nvPr>
+            <p:ph type="sldNum" idx="5" sz="quarter"/>
+          </p:nvPr>
+        </p:nvSpPr>
+        <p:spPr/>
+      </p:sp>
+    </p:spTree>
+  </p:cSld>
+  <p:clrMapOvr>
+    <a:masterClrMapping/>
+  </p:clrMapOvr>
+</p:notes>
 </file>
 
 <file path=ppt/slideLayouts/slideLayout1.xml><?xml version="1.0" encoding="utf-8"?>
@@ -3084,14 +3886,6 @@
 <file path=ppt/slides/slide1.xml><?xml version="1.0" encoding="utf-8"?>
 <p:sld xmlns:a="http://schemas.openxmlformats.org/drawingml/2006/main" xmlns:p="http://schemas.openxmlformats.org/presentationml/2006/main" xmlns:r="http://schemas.openxmlformats.org/officeDocument/2006/relationships">
   <p:cSld>
-    <p:bg>
-      <p:bgPr>
-        <a:solidFill>
-          <a:srgbClr val="22371F"/>
-        </a:solidFill>
-        <a:effectLst/>
-      </p:bgPr>
-    </p:bg>
     <p:spTree>
       <p:nvGrpSpPr>
         <p:cNvPr id="1" name=""/>
@@ -3101,153 +3895,7 @@
       <p:grpSpPr/>
       <p:pic>
         <p:nvPicPr>
-          <p:cNvPr id="2" name="Picture 1" descr="_s03-11-2026-costa-rica-early-bird1_0.jpg"/>
-          <p:cNvPicPr>
-            <a:picLocks noChangeAspect="1"/>
-          </p:cNvPicPr>
-          <p:nvPr/>
-        </p:nvPicPr>
-        <p:blipFill>
-          <a:blip r:embed="rId2"/>
-          <a:stretch>
-            <a:fillRect/>
-          </a:stretch>
-        </p:blipFill>
-        <p:spPr>
-          <a:xfrm>
-            <a:off x="0" y="0"/>
-            <a:ext cx="10287000" cy="7620000"/>
-          </a:xfrm>
-          <a:prstGeom prst="rect">
-            <a:avLst/>
-          </a:prstGeom>
-        </p:spPr>
-      </p:pic>
-      <p:sp>
-        <p:nvSpPr>
-          <p:cNvPr id="3" name="Rectangle 2"/>
-          <p:cNvSpPr/>
-          <p:nvPr/>
-        </p:nvSpPr>
-        <p:spPr>
-          <a:xfrm>
-            <a:off x="0" y="7048500"/>
-            <a:ext cx="10287000" cy="5810250"/>
-          </a:xfrm>
-          <a:prstGeom prst="rect">
-            <a:avLst/>
-          </a:prstGeom>
-          <a:solidFill>
-            <a:srgbClr val="22371F"/>
-          </a:solidFill>
-          <a:ln>
-            <a:noFill/>
-          </a:ln>
-          <a:effectLst/>
-        </p:spPr>
-        <p:style>
-          <a:lnRef idx="1">
-            <a:schemeClr val="accent1"/>
-          </a:lnRef>
-          <a:fillRef idx="3">
-            <a:schemeClr val="accent1"/>
-          </a:fillRef>
-          <a:effectRef idx="2">
-            <a:schemeClr val="accent1"/>
-          </a:effectRef>
-          <a:fontRef idx="minor">
-            <a:schemeClr val="lt1"/>
-          </a:fontRef>
-        </p:style>
-        <p:txBody>
-          <a:bodyPr rtlCol="0" anchor="ctr"/>
-          <a:lstStyle/>
-          <a:p>
-            <a:pPr algn="ctr"/>
-          </a:p>
-        </p:txBody>
-      </p:sp>
-      <p:sp>
-        <p:nvSpPr>
-          <p:cNvPr id="4" name="TextBox 3"/>
-          <p:cNvSpPr txBox="1"/>
-          <p:nvPr/>
-        </p:nvSpPr>
-        <p:spPr>
-          <a:xfrm>
-            <a:off x="685800" y="7620000"/>
-            <a:ext cx="7772400" cy="1905762"/>
-          </a:xfrm>
-          <a:prstGeom prst="rect">
-            <a:avLst/>
-          </a:prstGeom>
-          <a:noFill/>
-        </p:spPr>
-        <p:txBody>
-          <a:bodyPr wrap="square" lIns="0" rIns="0" tIns="0" bIns="0" anchor="t">
-            <a:spAutoFit/>
-          </a:bodyPr>
-          <a:lstStyle/>
-          <a:p>
-            <a:pPr algn="l">
-              <a:lnSpc>
-                <a:spcPct val="88560"/>
-              </a:lnSpc>
-            </a:pPr>
-            <a:r>
-              <a:rPr sz="6600" b="0">
-                <a:solidFill>
-                  <a:srgbClr val="F4F1EA"/>
-                </a:solidFill>
-                <a:latin typeface="Fredoka"/>
-              </a:rPr>
-              <a:t>The early bird ends tomorrow.</a:t>
-            </a:r>
-          </a:p>
-        </p:txBody>
-      </p:sp>
-      <p:sp>
-        <p:nvSpPr>
-          <p:cNvPr id="5" name="TextBox 4"/>
-          <p:cNvSpPr txBox="1"/>
-          <p:nvPr/>
-        </p:nvSpPr>
-        <p:spPr>
-          <a:xfrm>
-            <a:off x="685800" y="9754362"/>
-            <a:ext cx="7772400" cy="948690"/>
-          </a:xfrm>
-          <a:prstGeom prst="rect">
-            <a:avLst/>
-          </a:prstGeom>
-          <a:noFill/>
-        </p:spPr>
-        <p:txBody>
-          <a:bodyPr wrap="square" lIns="0" rIns="0" tIns="0" bIns="0" anchor="t">
-            <a:spAutoFit/>
-          </a:bodyPr>
-          <a:lstStyle/>
-          <a:p>
-            <a:pPr algn="l">
-              <a:lnSpc>
-                <a:spcPct val="114800"/>
-              </a:lnSpc>
-            </a:pPr>
-            <a:r>
-              <a:rPr sz="2400" b="1">
-                <a:solidFill>
-                  <a:srgbClr val="DDE5D4"/>
-                </a:solidFill>
-                <a:latin typeface="Montserrat"/>
-              </a:rPr>
-              <a:t>Accelerator Workshop, Costa Rica · 18 to 29 January 2027</a:t>
-            </a:r>
-          </a:p>
-        </p:txBody>
-      </p:sp>
-      <p:pic>
-        <p:nvPicPr>
-          <p:cNvPr id="6" name="Picture 5" descr="heliconia-sh.png"/>
+          <p:cNvPr id="2" name="photo IMG_4534" descr="image.jpg"/>
           <p:cNvPicPr>
             <a:picLocks noChangeAspect="1"/>
           </p:cNvPicPr>
@@ -3261,98 +3909,24 @@
         </p:blipFill>
         <p:spPr>
           <a:xfrm>
-            <a:off x="8382000" y="4000500"/>
-            <a:ext cx="1866900" cy="4000500"/>
+            <a:off x="0" y="0"/>
+            <a:ext cx="10287000" cy="12858750"/>
           </a:xfrm>
           <a:prstGeom prst="rect">
             <a:avLst/>
           </a:prstGeom>
         </p:spPr>
       </p:pic>
-      <p:pic>
-        <p:nvPicPr>
-          <p:cNvPr id="7" name="Picture 6" descr="logo-disc.png"/>
-          <p:cNvPicPr>
-            <a:picLocks noChangeAspect="1"/>
-          </p:cNvPicPr>
+      <p:sp>
+        <p:nvSpPr>
+          <p:cNvPr id="3" name="green band (continues into slide 2)"/>
+          <p:cNvSpPr/>
           <p:nvPr/>
-        </p:nvPicPr>
-        <p:blipFill>
-          <a:blip r:embed="rId4"/>
-          <a:stretch>
-            <a:fillRect/>
-          </a:stretch>
-        </p:blipFill>
+        </p:nvSpPr>
         <p:spPr>
           <a:xfrm>
-            <a:off x="8362950" y="10934700"/>
-            <a:ext cx="1238250" cy="1238250"/>
-          </a:xfrm>
-          <a:prstGeom prst="rect">
-            <a:avLst/>
-          </a:prstGeom>
-        </p:spPr>
-      </p:pic>
-    </p:spTree>
-  </p:cSld>
-  <p:clrMapOvr>
-    <a:masterClrMapping/>
-  </p:clrMapOvr>
-</p:sld>
-</file>
-
-<file path=ppt/slides/slide2.xml><?xml version="1.0" encoding="utf-8"?>
-<p:sld xmlns:a="http://schemas.openxmlformats.org/drawingml/2006/main" xmlns:p="http://schemas.openxmlformats.org/presentationml/2006/main" xmlns:r="http://schemas.openxmlformats.org/officeDocument/2006/relationships">
-  <p:cSld>
-    <p:bg>
-      <p:bgPr>
-        <a:solidFill>
-          <a:srgbClr val="F4F1EA"/>
-        </a:solidFill>
-        <a:effectLst/>
-      </p:bgPr>
-    </p:bg>
-    <p:spTree>
-      <p:nvGrpSpPr>
-        <p:cNvPr id="1" name=""/>
-        <p:cNvGrpSpPr/>
-        <p:nvPr/>
-      </p:nvGrpSpPr>
-      <p:grpSpPr/>
-      <p:pic>
-        <p:nvPicPr>
-          <p:cNvPr id="2" name="Picture 1" descr="_s03-11-2026-costa-rica-early-bird2_0.jpg"/>
-          <p:cNvPicPr>
-            <a:picLocks noChangeAspect="1"/>
-          </p:cNvPicPr>
-          <p:nvPr/>
-        </p:nvPicPr>
-        <p:blipFill>
-          <a:blip r:embed="rId2"/>
-          <a:stretch>
-            <a:fillRect/>
-          </a:stretch>
-        </p:blipFill>
-        <p:spPr>
-          <a:xfrm>
-            <a:off x="0" y="0"/>
-            <a:ext cx="10287000" cy="8191500"/>
-          </a:xfrm>
-          <a:prstGeom prst="rect">
-            <a:avLst/>
-          </a:prstGeom>
-        </p:spPr>
-      </p:pic>
-      <p:sp>
-        <p:nvSpPr>
-          <p:cNvPr id="3" name="Rectangle 2"/>
-          <p:cNvSpPr/>
-          <p:nvPr/>
-        </p:nvSpPr>
-        <p:spPr>
-          <a:xfrm>
-            <a:off x="685800" y="6667500"/>
-            <a:ext cx="8915400" cy="4095750"/>
+            <a:off x="571500" y="7905750"/>
+            <a:ext cx="9715500" cy="3810000"/>
           </a:xfrm>
           <a:prstGeom prst="rect">
             <a:avLst/>
@@ -3389,14 +3963,14 @@
       </p:sp>
       <p:sp>
         <p:nvSpPr>
-          <p:cNvPr id="4" name="TextBox 3"/>
+          <p:cNvPr id="4" name="headline"/>
           <p:cNvSpPr txBox="1"/>
           <p:nvPr/>
         </p:nvSpPr>
         <p:spPr>
           <a:xfrm>
-            <a:off x="1162050" y="7143750"/>
-            <a:ext cx="6724650" cy="1535430"/>
+            <a:off x="1047750" y="8286750"/>
+            <a:ext cx="8858250" cy="1905000"/>
           </a:xfrm>
           <a:prstGeom prst="rect">
             <a:avLst/>
@@ -3411,31 +3985,31 @@
           <a:p>
             <a:pPr algn="l">
               <a:lnSpc>
-                <a:spcPct val="88560"/>
+                <a:spcPct val="105000"/>
               </a:lnSpc>
             </a:pPr>
             <a:r>
-              <a:rPr sz="5250" b="0">
+              <a:rPr sz="4800" b="1">
                 <a:solidFill>
                   <a:srgbClr val="F4F1EA"/>
                 </a:solidFill>
-                <a:latin typeface="Fredoka"/>
+                <a:latin typeface="Montserrat"/>
               </a:rPr>
-              <a:t>A year of hands-on experience in 10 days.</a:t>
-            </a:r>
-          </a:p>
-        </p:txBody>
-      </p:sp>
-      <p:sp>
-        <p:nvSpPr>
-          <p:cNvPr id="5" name="TextBox 4"/>
+              <a:t>Early Nematode Discount ends tomorrow</a:t>
+            </a:r>
+          </a:p>
+        </p:txBody>
+      </p:sp>
+      <p:sp>
+        <p:nvSpPr>
+          <p:cNvPr id="5" name="small line"/>
           <p:cNvSpPr txBox="1"/>
           <p:nvPr/>
         </p:nvSpPr>
         <p:spPr>
           <a:xfrm>
-            <a:off x="1162050" y="8907780"/>
-            <a:ext cx="6724650" cy="1375409"/>
+            <a:off x="1066800" y="10953750"/>
+            <a:ext cx="8572500" cy="476250"/>
           </a:xfrm>
           <a:prstGeom prst="rect">
             <a:avLst/>
@@ -3450,24 +4024,42 @@
           <a:p>
             <a:pPr algn="l">
               <a:lnSpc>
-                <a:spcPct val="114800"/>
+                <a:spcPct val="105000"/>
               </a:lnSpc>
             </a:pPr>
             <a:r>
-              <a:rPr sz="2400" b="0">
+              <a:rPr sz="2850" b="0">
                 <a:solidFill>
-                  <a:srgbClr val="DDE5D4"/>
+                  <a:srgbClr val="F4F1EA"/>
                 </a:solidFill>
-                <a:latin typeface="Montserrat"/>
+                <a:latin typeface="Source Sans 3"/>
               </a:rPr>
-              <a:t>What takes 18 to 24 months alone, you do here in two weeks, with mentors beside you.</a:t>
-            </a:r>
-          </a:p>
-        </p:txBody>
-      </p:sp>
+              <a:t>Accelerator Workshop · Costa Rica</a:t>
+            </a:r>
+          </a:p>
+        </p:txBody>
+      </p:sp>
+    </p:spTree>
+  </p:cSld>
+  <p:clrMapOvr>
+    <a:masterClrMapping/>
+  </p:clrMapOvr>
+</p:sld>
+</file>
+
+<file path=ppt/slides/slide2.xml><?xml version="1.0" encoding="utf-8"?>
+<p:sld xmlns:a="http://schemas.openxmlformats.org/drawingml/2006/main" xmlns:p="http://schemas.openxmlformats.org/presentationml/2006/main" xmlns:r="http://schemas.openxmlformats.org/officeDocument/2006/relationships">
+  <p:cSld>
+    <p:spTree>
+      <p:nvGrpSpPr>
+        <p:cNvPr id="1" name=""/>
+        <p:cNvGrpSpPr/>
+        <p:nvPr/>
+      </p:nvGrpSpPr>
+      <p:grpSpPr/>
       <p:pic>
         <p:nvPicPr>
-          <p:cNvPr id="6" name="Picture 5" descr="torch-ginger-sh.png"/>
+          <p:cNvPr id="2" name="photo PXL_20251022_151710920" descr="image.jpg"/>
           <p:cNvPicPr>
             <a:picLocks noChangeAspect="1"/>
           </p:cNvPicPr>
@@ -3481,382 +4073,30 @@
         </p:blipFill>
         <p:spPr>
           <a:xfrm>
-            <a:off x="8477250" y="3810000"/>
-            <a:ext cx="2381250" cy="3810000"/>
+            <a:off x="3810000" y="0"/>
+            <a:ext cx="6477000" cy="12858750"/>
           </a:xfrm>
           <a:prstGeom prst="rect">
             <a:avLst/>
           </a:prstGeom>
         </p:spPr>
       </p:pic>
-      <p:pic>
-        <p:nvPicPr>
-          <p:cNvPr id="7" name="Picture 6" descr="logo.png"/>
-          <p:cNvPicPr>
-            <a:picLocks noChangeAspect="1"/>
-          </p:cNvPicPr>
+      <p:sp>
+        <p:nvSpPr>
+          <p:cNvPr id="3" name="green band (continues into slide 2)"/>
+          <p:cNvSpPr/>
           <p:nvPr/>
-        </p:nvPicPr>
-        <p:blipFill>
-          <a:blip r:embed="rId4"/>
-          <a:stretch>
-            <a:fillRect/>
-          </a:stretch>
-        </p:blipFill>
+        </p:nvSpPr>
         <p:spPr>
           <a:xfrm>
-            <a:off x="8458200" y="11029950"/>
-            <a:ext cx="1143000" cy="990600"/>
-          </a:xfrm>
-          <a:prstGeom prst="rect">
-            <a:avLst/>
-          </a:prstGeom>
-        </p:spPr>
-      </p:pic>
-    </p:spTree>
-  </p:cSld>
-  <p:clrMapOvr>
-    <a:masterClrMapping/>
-  </p:clrMapOvr>
-</p:sld>
-</file>
-
-<file path=ppt/slides/slide3.xml><?xml version="1.0" encoding="utf-8"?>
-<p:sld xmlns:a="http://schemas.openxmlformats.org/drawingml/2006/main" xmlns:p="http://schemas.openxmlformats.org/presentationml/2006/main" xmlns:r="http://schemas.openxmlformats.org/officeDocument/2006/relationships">
-  <p:cSld>
-    <p:bg>
-      <p:bgPr>
-        <a:solidFill>
-          <a:srgbClr val="F4F1EA"/>
-        </a:solidFill>
-        <a:effectLst/>
-      </p:bgPr>
-    </p:bg>
-    <p:spTree>
-      <p:nvGrpSpPr>
-        <p:cNvPr id="1" name=""/>
-        <p:cNvGrpSpPr/>
-        <p:nvPr/>
-      </p:nvGrpSpPr>
-      <p:grpSpPr/>
-      <p:pic>
-        <p:nvPicPr>
-          <p:cNvPr id="2" name="Picture 1" descr="_s03-11-2026-costa-rica-early-bird3_0.jpg"/>
-          <p:cNvPicPr>
-            <a:picLocks noChangeAspect="1"/>
-          </p:cNvPicPr>
-          <p:nvPr/>
-        </p:nvPicPr>
-        <p:blipFill>
-          <a:blip r:embed="rId2"/>
-          <a:stretch>
-            <a:fillRect/>
-          </a:stretch>
-        </p:blipFill>
-        <p:spPr>
-          <a:xfrm>
-            <a:off x="0" y="0"/>
-            <a:ext cx="5143500" cy="7810500"/>
-          </a:xfrm>
-          <a:prstGeom prst="rect">
-            <a:avLst/>
-          </a:prstGeom>
-        </p:spPr>
-      </p:pic>
-      <p:pic>
-        <p:nvPicPr>
-          <p:cNvPr id="3" name="Picture 2" descr="_s03-11-2026-costa-rica-early-bird3_1.jpg"/>
-          <p:cNvPicPr>
-            <a:picLocks noChangeAspect="1"/>
-          </p:cNvPicPr>
-          <p:nvPr/>
-        </p:nvPicPr>
-        <p:blipFill>
-          <a:blip r:embed="rId3"/>
-          <a:stretch>
-            <a:fillRect/>
-          </a:stretch>
-        </p:blipFill>
-        <p:spPr>
-          <a:xfrm>
-            <a:off x="5143500" y="0"/>
-            <a:ext cx="5143500" cy="7810500"/>
-          </a:xfrm>
-          <a:prstGeom prst="rect">
-            <a:avLst/>
-          </a:prstGeom>
-        </p:spPr>
-      </p:pic>
-      <p:sp>
-        <p:nvSpPr>
-          <p:cNvPr id="4" name="TextBox 3"/>
-          <p:cNvSpPr txBox="1"/>
-          <p:nvPr/>
-        </p:nvSpPr>
-        <p:spPr>
-          <a:xfrm>
-            <a:off x="685800" y="8382000"/>
-            <a:ext cx="4000500" cy="495300"/>
-          </a:xfrm>
-          <a:prstGeom prst="rect">
-            <a:avLst/>
-          </a:prstGeom>
-          <a:noFill/>
-        </p:spPr>
-        <p:txBody>
-          <a:bodyPr wrap="square" lIns="0" rIns="0" tIns="0" bIns="0" anchor="t">
-            <a:spAutoFit/>
-          </a:bodyPr>
-          <a:lstStyle/>
-          <a:p>
-            <a:pPr algn="l">
-              <a:lnSpc>
-                <a:spcPct val="114800"/>
-              </a:lnSpc>
-            </a:pPr>
-            <a:r>
-              <a:rPr sz="2250" b="1">
-                <a:solidFill>
-                  <a:srgbClr val="156826"/>
-                </a:solidFill>
-                <a:latin typeface="Montserrat"/>
-              </a:rPr>
-              <a:t>WEEK ONE</a:t>
-            </a:r>
-          </a:p>
-        </p:txBody>
-      </p:sp>
-      <p:sp>
-        <p:nvSpPr>
-          <p:cNvPr id="5" name="TextBox 4"/>
-          <p:cNvSpPr txBox="1"/>
-          <p:nvPr/>
-        </p:nvSpPr>
-        <p:spPr>
-          <a:xfrm>
-            <a:off x="685800" y="8810625"/>
-            <a:ext cx="4191000" cy="877062"/>
-          </a:xfrm>
-          <a:prstGeom prst="rect">
-            <a:avLst/>
-          </a:prstGeom>
-          <a:noFill/>
-        </p:spPr>
-        <p:txBody>
-          <a:bodyPr wrap="square" lIns="0" rIns="0" tIns="0" bIns="0" anchor="t">
-            <a:spAutoFit/>
-          </a:bodyPr>
-          <a:lstStyle/>
-          <a:p>
-            <a:pPr algn="l">
-              <a:lnSpc>
-                <a:spcPct val="88560"/>
-              </a:lnSpc>
-            </a:pPr>
-            <a:r>
-              <a:rPr sz="5700" b="0">
-                <a:solidFill>
-                  <a:srgbClr val="4F3433"/>
-                </a:solidFill>
-                <a:latin typeface="Fredoka"/>
-              </a:rPr>
-              <a:t>Compost</a:t>
-            </a:r>
-          </a:p>
-        </p:txBody>
-      </p:sp>
-      <p:sp>
-        <p:nvSpPr>
-          <p:cNvPr id="6" name="TextBox 5"/>
-          <p:cNvSpPr txBox="1"/>
-          <p:nvPr/>
-        </p:nvSpPr>
-        <p:spPr>
-          <a:xfrm>
-            <a:off x="5429250" y="8382000"/>
-            <a:ext cx="4191000" cy="495300"/>
-          </a:xfrm>
-          <a:prstGeom prst="rect">
-            <a:avLst/>
-          </a:prstGeom>
-          <a:noFill/>
-        </p:spPr>
-        <p:txBody>
-          <a:bodyPr wrap="square" lIns="0" rIns="0" tIns="0" bIns="0" anchor="t">
-            <a:spAutoFit/>
-          </a:bodyPr>
-          <a:lstStyle/>
-          <a:p>
-            <a:pPr algn="l">
-              <a:lnSpc>
-                <a:spcPct val="114800"/>
-              </a:lnSpc>
-            </a:pPr>
-            <a:r>
-              <a:rPr sz="2250" b="1">
-                <a:solidFill>
-                  <a:srgbClr val="156826"/>
-                </a:solidFill>
-                <a:latin typeface="Montserrat"/>
-              </a:rPr>
-              <a:t>WEEK TWO</a:t>
-            </a:r>
-          </a:p>
-        </p:txBody>
-      </p:sp>
-      <p:sp>
-        <p:nvSpPr>
-          <p:cNvPr id="7" name="TextBox 6"/>
-          <p:cNvSpPr txBox="1"/>
-          <p:nvPr/>
-        </p:nvSpPr>
-        <p:spPr>
-          <a:xfrm>
-            <a:off x="5429250" y="8810625"/>
-            <a:ext cx="4191000" cy="1658874"/>
-          </a:xfrm>
-          <a:prstGeom prst="rect">
-            <a:avLst/>
-          </a:prstGeom>
-          <a:noFill/>
-        </p:spPr>
-        <p:txBody>
-          <a:bodyPr wrap="square" lIns="0" rIns="0" tIns="0" bIns="0" anchor="t">
-            <a:spAutoFit/>
-          </a:bodyPr>
-          <a:lstStyle/>
-          <a:p>
-            <a:pPr algn="l">
-              <a:lnSpc>
-                <a:spcPct val="88560"/>
-              </a:lnSpc>
-            </a:pPr>
-            <a:r>
-              <a:rPr sz="5700" b="0">
-                <a:solidFill>
-                  <a:srgbClr val="4F3433"/>
-                </a:solidFill>
-                <a:latin typeface="Fredoka"/>
-              </a:rPr>
-              <a:t>Liquid amendments</a:t>
-            </a:r>
-          </a:p>
-        </p:txBody>
-      </p:sp>
-      <p:pic>
-        <p:nvPicPr>
-          <p:cNvPr id="8" name="Picture 7" descr="poro-flower-sh.png"/>
-          <p:cNvPicPr>
-            <a:picLocks noChangeAspect="1"/>
-          </p:cNvPicPr>
-          <p:nvPr/>
-        </p:nvPicPr>
-        <p:blipFill>
-          <a:blip r:embed="rId4"/>
-          <a:stretch>
-            <a:fillRect/>
-          </a:stretch>
-        </p:blipFill>
-        <p:spPr>
-          <a:xfrm>
-            <a:off x="-381000" y="10953750"/>
-            <a:ext cx="2571750" cy="2095500"/>
-          </a:xfrm>
-          <a:prstGeom prst="rect">
-            <a:avLst/>
-          </a:prstGeom>
-        </p:spPr>
-      </p:pic>
-      <p:pic>
-        <p:nvPicPr>
-          <p:cNvPr id="9" name="Picture 8" descr="logo.png"/>
-          <p:cNvPicPr>
-            <a:picLocks noChangeAspect="1"/>
-          </p:cNvPicPr>
-          <p:nvPr/>
-        </p:nvPicPr>
-        <p:blipFill>
-          <a:blip r:embed="rId5"/>
-          <a:stretch>
-            <a:fillRect/>
-          </a:stretch>
-        </p:blipFill>
-        <p:spPr>
-          <a:xfrm>
-            <a:off x="8458200" y="11029950"/>
-            <a:ext cx="1143000" cy="990600"/>
-          </a:xfrm>
-          <a:prstGeom prst="rect">
-            <a:avLst/>
-          </a:prstGeom>
-        </p:spPr>
-      </p:pic>
-    </p:spTree>
-  </p:cSld>
-  <p:clrMapOvr>
-    <a:masterClrMapping/>
-  </p:clrMapOvr>
-</p:sld>
-</file>
-
-<file path=ppt/slides/slide4.xml><?xml version="1.0" encoding="utf-8"?>
-<p:sld xmlns:a="http://schemas.openxmlformats.org/drawingml/2006/main" xmlns:p="http://schemas.openxmlformats.org/presentationml/2006/main" xmlns:r="http://schemas.openxmlformats.org/officeDocument/2006/relationships">
-  <p:cSld>
-    <p:bg>
-      <p:bgPr>
-        <a:solidFill>
-          <a:srgbClr val="DDE5D4"/>
-        </a:solidFill>
-        <a:effectLst/>
-      </p:bgPr>
-    </p:bg>
-    <p:spTree>
-      <p:nvGrpSpPr>
-        <p:cNvPr id="1" name=""/>
-        <p:cNvGrpSpPr/>
-        <p:nvPr/>
-      </p:nvGrpSpPr>
-      <p:grpSpPr/>
-      <p:pic>
-        <p:nvPicPr>
-          <p:cNvPr id="2" name="Picture 1" descr="_s03-11-2026-costa-rica-early-bird4_0.jpg"/>
-          <p:cNvPicPr>
-            <a:picLocks noChangeAspect="1"/>
-          </p:cNvPicPr>
-          <p:nvPr/>
-        </p:nvPicPr>
-        <p:blipFill>
-          <a:blip r:embed="rId2"/>
-          <a:stretch>
-            <a:fillRect/>
-          </a:stretch>
-        </p:blipFill>
-        <p:spPr>
-          <a:xfrm>
-            <a:off x="0" y="0"/>
-            <a:ext cx="10287000" cy="8191500"/>
-          </a:xfrm>
-          <a:prstGeom prst="rect">
-            <a:avLst/>
-          </a:prstGeom>
-        </p:spPr>
-      </p:pic>
-      <p:sp>
-        <p:nvSpPr>
-          <p:cNvPr id="3" name="Rectangle 2"/>
-          <p:cNvSpPr/>
-          <p:nvPr/>
-        </p:nvSpPr>
-        <p:spPr>
-          <a:xfrm>
-            <a:off x="685800" y="6667500"/>
-            <a:ext cx="8915400" cy="4095750"/>
+            <a:off x="0" y="7905750"/>
+            <a:ext cx="3810000" cy="3810000"/>
           </a:xfrm>
           <a:prstGeom prst="rect">
             <a:avLst/>
           </a:prstGeom>
           <a:solidFill>
-            <a:srgbClr val="22371F"/>
+            <a:srgbClr val="156826"/>
           </a:solidFill>
           <a:ln>
             <a:noFill/>
@@ -3887,14 +4127,58 @@
       </p:sp>
       <p:sp>
         <p:nvSpPr>
-          <p:cNvPr id="4" name="TextBox 3"/>
+          <p:cNvPr id="4" name="green band slide 2"/>
+          <p:cNvSpPr/>
+          <p:nvPr/>
+        </p:nvSpPr>
+        <p:spPr>
+          <a:xfrm>
+            <a:off x="0" y="0"/>
+            <a:ext cx="3810000" cy="12858750"/>
+          </a:xfrm>
+          <a:prstGeom prst="rect">
+            <a:avLst/>
+          </a:prstGeom>
+          <a:solidFill>
+            <a:srgbClr val="156826"/>
+          </a:solidFill>
+          <a:ln>
+            <a:noFill/>
+          </a:ln>
+          <a:effectLst/>
+        </p:spPr>
+        <p:style>
+          <a:lnRef idx="1">
+            <a:schemeClr val="accent1"/>
+          </a:lnRef>
+          <a:fillRef idx="3">
+            <a:schemeClr val="accent1"/>
+          </a:fillRef>
+          <a:effectRef idx="2">
+            <a:schemeClr val="accent1"/>
+          </a:effectRef>
+          <a:fontRef idx="minor">
+            <a:schemeClr val="lt1"/>
+          </a:fontRef>
+        </p:style>
+        <p:txBody>
+          <a:bodyPr rtlCol="0" anchor="ctr"/>
+          <a:lstStyle/>
+          <a:p>
+            <a:pPr algn="ctr"/>
+          </a:p>
+        </p:txBody>
+      </p:sp>
+      <p:sp>
+        <p:nvSpPr>
+          <p:cNvPr id="5" name="headline"/>
           <p:cNvSpPr txBox="1"/>
           <p:nvPr/>
         </p:nvSpPr>
         <p:spPr>
           <a:xfrm>
-            <a:off x="1162050" y="7143750"/>
-            <a:ext cx="6724650" cy="1535430"/>
+            <a:off x="381000" y="2857500"/>
+            <a:ext cx="3238500" cy="4953000"/>
           </a:xfrm>
           <a:prstGeom prst="rect">
             <a:avLst/>
@@ -3909,63 +4193,42 @@
           <a:p>
             <a:pPr algn="l">
               <a:lnSpc>
-                <a:spcPct val="88560"/>
+                <a:spcPct val="105000"/>
               </a:lnSpc>
             </a:pPr>
             <a:r>
-              <a:rPr sz="5250" b="0">
+              <a:rPr sz="4350" b="1">
                 <a:solidFill>
                   <a:srgbClr val="F4F1EA"/>
                 </a:solidFill>
-                <a:latin typeface="Fredoka"/>
-              </a:rPr>
-              <a:t>The microscope, every day.</a:t>
-            </a:r>
-          </a:p>
-        </p:txBody>
-      </p:sp>
-      <p:sp>
-        <p:nvSpPr>
-          <p:cNvPr id="5" name="TextBox 4"/>
-          <p:cNvSpPr txBox="1"/>
-          <p:nvPr/>
-        </p:nvSpPr>
-        <p:spPr>
-          <a:xfrm>
-            <a:off x="1162050" y="8907780"/>
-            <a:ext cx="6724650" cy="948690"/>
-          </a:xfrm>
-          <a:prstGeom prst="rect">
-            <a:avLst/>
-          </a:prstGeom>
-          <a:noFill/>
-        </p:spPr>
-        <p:txBody>
-          <a:bodyPr wrap="square" lIns="0" rIns="0" tIns="0" bIns="0" anchor="t">
-            <a:spAutoFit/>
-          </a:bodyPr>
-          <a:lstStyle/>
-          <a:p>
-            <a:pPr algn="l">
-              <a:lnSpc>
-                <a:spcPct val="114800"/>
-              </a:lnSpc>
-            </a:pPr>
-            <a:r>
-              <a:rPr sz="2400" b="0">
-                <a:solidFill>
-                  <a:srgbClr val="DDE5D4"/>
-                </a:solidFill>
                 <a:latin typeface="Montserrat"/>
               </a:rPr>
-              <a:t>The early bird ends 4 November. Register, link in bio.</a:t>
-            </a:r>
-          </a:p>
-        </p:txBody>
-      </p:sp>
+              <a:t>Ten days of hands‑on training</a:t>
+            </a:r>
+          </a:p>
+        </p:txBody>
+      </p:sp>
+    </p:spTree>
+  </p:cSld>
+  <p:clrMapOvr>
+    <a:masterClrMapping/>
+  </p:clrMapOvr>
+</p:sld>
+</file>
+
+<file path=ppt/slides/slide3.xml><?xml version="1.0" encoding="utf-8"?>
+<p:sld xmlns:a="http://schemas.openxmlformats.org/drawingml/2006/main" xmlns:p="http://schemas.openxmlformats.org/presentationml/2006/main" xmlns:r="http://schemas.openxmlformats.org/officeDocument/2006/relationships">
+  <p:cSld>
+    <p:spTree>
+      <p:nvGrpSpPr>
+        <p:cNvPr id="1" name=""/>
+        <p:cNvGrpSpPr/>
+        <p:nvPr/>
+      </p:nvGrpSpPr>
+      <p:grpSpPr/>
       <p:pic>
         <p:nvPicPr>
-          <p:cNvPr id="6" name="Picture 5" descr="hibiscus-sh.png"/>
+          <p:cNvPr id="2" name="photo HandsInSoil" descr="image.jpg"/>
           <p:cNvPicPr>
             <a:picLocks noChangeAspect="1"/>
           </p:cNvPicPr>
@@ -3979,8 +4242,133 @@
         </p:blipFill>
         <p:spPr>
           <a:xfrm>
-            <a:off x="8001000" y="5619750"/>
-            <a:ext cx="1781175" cy="2000250"/>
+            <a:off x="0" y="0"/>
+            <a:ext cx="10287000" cy="7905750"/>
+          </a:xfrm>
+          <a:prstGeom prst="rect">
+            <a:avLst/>
+          </a:prstGeom>
+        </p:spPr>
+      </p:pic>
+      <p:sp>
+        <p:nvSpPr>
+          <p:cNvPr id="3" name="soil brown box"/>
+          <p:cNvSpPr/>
+          <p:nvPr/>
+        </p:nvSpPr>
+        <p:spPr>
+          <a:xfrm>
+            <a:off x="0" y="7239000"/>
+            <a:ext cx="10287000" cy="5619750"/>
+          </a:xfrm>
+          <a:prstGeom prst="rect">
+            <a:avLst/>
+          </a:prstGeom>
+          <a:solidFill>
+            <a:srgbClr val="4F3433"/>
+          </a:solidFill>
+          <a:ln>
+            <a:noFill/>
+          </a:ln>
+          <a:effectLst/>
+        </p:spPr>
+        <p:style>
+          <a:lnRef idx="1">
+            <a:schemeClr val="accent1"/>
+          </a:lnRef>
+          <a:fillRef idx="3">
+            <a:schemeClr val="accent1"/>
+          </a:fillRef>
+          <a:effectRef idx="2">
+            <a:schemeClr val="accent1"/>
+          </a:effectRef>
+          <a:fontRef idx="minor">
+            <a:schemeClr val="lt1"/>
+          </a:fontRef>
+        </p:style>
+        <p:txBody>
+          <a:bodyPr rtlCol="0" anchor="ctr"/>
+          <a:lstStyle/>
+          <a:p>
+            <a:pPr algn="ctr"/>
+          </a:p>
+        </p:txBody>
+      </p:sp>
+      <p:sp>
+        <p:nvSpPr>
+          <p:cNvPr id="4" name="headline"/>
+          <p:cNvSpPr txBox="1"/>
+          <p:nvPr/>
+        </p:nvSpPr>
+        <p:spPr>
+          <a:xfrm>
+            <a:off x="762000" y="8191500"/>
+            <a:ext cx="8572500" cy="3619500"/>
+          </a:xfrm>
+          <a:prstGeom prst="rect">
+            <a:avLst/>
+          </a:prstGeom>
+          <a:noFill/>
+        </p:spPr>
+        <p:txBody>
+          <a:bodyPr wrap="square" lIns="0" rIns="0" tIns="0" bIns="0" anchor="t">
+            <a:spAutoFit/>
+          </a:bodyPr>
+          <a:lstStyle/>
+          <a:p>
+            <a:pPr algn="l">
+              <a:lnSpc>
+                <a:spcPct val="105000"/>
+              </a:lnSpc>
+            </a:pPr>
+            <a:r>
+              <a:rPr sz="5400" b="1">
+                <a:solidFill>
+                  <a:srgbClr val="F4F1EA"/>
+                </a:solidFill>
+                <a:latin typeface="Montserrat"/>
+              </a:rPr>
+              <a:t>Build BioComplete™ compost with your team</a:t>
+            </a:r>
+          </a:p>
+        </p:txBody>
+      </p:sp>
+    </p:spTree>
+  </p:cSld>
+  <p:clrMapOvr>
+    <a:masterClrMapping/>
+  </p:clrMapOvr>
+</p:sld>
+</file>
+
+<file path=ppt/slides/slide4.xml><?xml version="1.0" encoding="utf-8"?>
+<p:sld xmlns:a="http://schemas.openxmlformats.org/drawingml/2006/main" xmlns:p="http://schemas.openxmlformats.org/presentationml/2006/main" xmlns:r="http://schemas.openxmlformats.org/officeDocument/2006/relationships">
+  <p:cSld>
+    <p:spTree>
+      <p:nvGrpSpPr>
+        <p:cNvPr id="1" name=""/>
+        <p:cNvGrpSpPr/>
+        <p:nvPr/>
+      </p:nvGrpSpPr>
+      <p:grpSpPr/>
+      <p:pic>
+        <p:nvPicPr>
+          <p:cNvPr id="2" name="photo PXL_20251020_222404850" descr="image.jpg"/>
+          <p:cNvPicPr>
+            <a:picLocks noChangeAspect="1"/>
+          </p:cNvPicPr>
+          <p:nvPr/>
+        </p:nvPicPr>
+        <p:blipFill>
+          <a:blip r:embed="rId3"/>
+          <a:stretch>
+            <a:fillRect/>
+          </a:stretch>
+        </p:blipFill>
+        <p:spPr>
+          <a:xfrm>
+            <a:off x="0" y="0"/>
+            <a:ext cx="10287000" cy="6429375"/>
           </a:xfrm>
           <a:prstGeom prst="rect">
             <a:avLst/>
@@ -3989,7 +4377,7 @@
       </p:pic>
       <p:pic>
         <p:nvPicPr>
-          <p:cNvPr id="7" name="Picture 6" descr="logo.png"/>
+          <p:cNvPr id="3" name="photo Compost Tea Prep" descr="image.jpg"/>
           <p:cNvPicPr>
             <a:picLocks noChangeAspect="1"/>
           </p:cNvPicPr>
@@ -4003,8 +4391,482 @@
         </p:blipFill>
         <p:spPr>
           <a:xfrm>
-            <a:off x="8458200" y="11029950"/>
-            <a:ext cx="1143000" cy="990600"/>
+            <a:off x="0" y="6429375"/>
+            <a:ext cx="10287000" cy="6429375"/>
+          </a:xfrm>
+          <a:prstGeom prst="rect">
+            <a:avLst/>
+          </a:prstGeom>
+        </p:spPr>
+      </p:pic>
+      <p:sp>
+        <p:nvSpPr>
+          <p:cNvPr id="4" name="cream box"/>
+          <p:cNvSpPr/>
+          <p:nvPr/>
+        </p:nvSpPr>
+        <p:spPr>
+          <a:xfrm>
+            <a:off x="1333500" y="5191125"/>
+            <a:ext cx="8953500" cy="2476500"/>
+          </a:xfrm>
+          <a:prstGeom prst="rect">
+            <a:avLst/>
+          </a:prstGeom>
+          <a:solidFill>
+            <a:srgbClr val="F4F1EA"/>
+          </a:solidFill>
+          <a:ln>
+            <a:noFill/>
+          </a:ln>
+          <a:effectLst/>
+        </p:spPr>
+        <p:style>
+          <a:lnRef idx="1">
+            <a:schemeClr val="accent1"/>
+          </a:lnRef>
+          <a:fillRef idx="3">
+            <a:schemeClr val="accent1"/>
+          </a:fillRef>
+          <a:effectRef idx="2">
+            <a:schemeClr val="accent1"/>
+          </a:effectRef>
+          <a:fontRef idx="minor">
+            <a:schemeClr val="lt1"/>
+          </a:fontRef>
+        </p:style>
+        <p:txBody>
+          <a:bodyPr rtlCol="0" anchor="ctr"/>
+          <a:lstStyle/>
+          <a:p>
+            <a:pPr algn="ctr"/>
+          </a:p>
+        </p:txBody>
+      </p:sp>
+      <p:sp>
+        <p:nvSpPr>
+          <p:cNvPr id="5" name="headline"/>
+          <p:cNvSpPr txBox="1"/>
+          <p:nvPr/>
+        </p:nvSpPr>
+        <p:spPr>
+          <a:xfrm>
+            <a:off x="1905000" y="5191125"/>
+            <a:ext cx="8001000" cy="2476500"/>
+          </a:xfrm>
+          <a:prstGeom prst="rect">
+            <a:avLst/>
+          </a:prstGeom>
+          <a:noFill/>
+        </p:spPr>
+        <p:txBody>
+          <a:bodyPr wrap="square" lIns="0" rIns="0" tIns="0" bIns="0" anchor="ctr">
+            <a:spAutoFit/>
+          </a:bodyPr>
+          <a:lstStyle/>
+          <a:p>
+            <a:pPr algn="l">
+              <a:lnSpc>
+                <a:spcPct val="105000"/>
+              </a:lnSpc>
+            </a:pPr>
+            <a:r>
+              <a:rPr sz="5550" b="1">
+                <a:solidFill>
+                  <a:srgbClr val="4F3433"/>
+                </a:solidFill>
+                <a:latin typeface="Montserrat"/>
+              </a:rPr>
+              <a:t>Brew extracts and teas</a:t>
+            </a:r>
+          </a:p>
+        </p:txBody>
+      </p:sp>
+    </p:spTree>
+  </p:cSld>
+  <p:clrMapOvr>
+    <a:masterClrMapping/>
+  </p:clrMapOvr>
+</p:sld>
+</file>
+
+<file path=ppt/slides/slide5.xml><?xml version="1.0" encoding="utf-8"?>
+<p:sld xmlns:a="http://schemas.openxmlformats.org/drawingml/2006/main" xmlns:p="http://schemas.openxmlformats.org/presentationml/2006/main" xmlns:r="http://schemas.openxmlformats.org/officeDocument/2006/relationships">
+  <p:cSld>
+    <p:spTree>
+      <p:nvGrpSpPr>
+        <p:cNvPr id="1" name=""/>
+        <p:cNvGrpSpPr/>
+        <p:nvPr/>
+      </p:nvGrpSpPr>
+      <p:grpSpPr/>
+      <p:pic>
+        <p:nvPicPr>
+          <p:cNvPr id="2" name="photo PXL_20251023_191907277" descr="image.jpg"/>
+          <p:cNvPicPr>
+            <a:picLocks noChangeAspect="1"/>
+          </p:cNvPicPr>
+          <p:nvPr/>
+        </p:nvPicPr>
+        <p:blipFill>
+          <a:blip r:embed="rId3"/>
+          <a:stretch>
+            <a:fillRect/>
+          </a:stretch>
+        </p:blipFill>
+        <p:spPr>
+          <a:xfrm>
+            <a:off x="0" y="0"/>
+            <a:ext cx="10287000" cy="12858750"/>
+          </a:xfrm>
+          <a:prstGeom prst="rect">
+            <a:avLst/>
+          </a:prstGeom>
+        </p:spPr>
+      </p:pic>
+      <p:sp>
+        <p:nvSpPr>
+          <p:cNvPr id="3" name="education blue box"/>
+          <p:cNvSpPr/>
+          <p:nvPr/>
+        </p:nvSpPr>
+        <p:spPr>
+          <a:xfrm>
+            <a:off x="0" y="0"/>
+            <a:ext cx="7239000" cy="4476750"/>
+          </a:xfrm>
+          <a:prstGeom prst="rect">
+            <a:avLst/>
+          </a:prstGeom>
+          <a:solidFill>
+            <a:srgbClr val="3780B8"/>
+          </a:solidFill>
+          <a:ln>
+            <a:noFill/>
+          </a:ln>
+          <a:effectLst/>
+        </p:spPr>
+        <p:style>
+          <a:lnRef idx="1">
+            <a:schemeClr val="accent1"/>
+          </a:lnRef>
+          <a:fillRef idx="3">
+            <a:schemeClr val="accent1"/>
+          </a:fillRef>
+          <a:effectRef idx="2">
+            <a:schemeClr val="accent1"/>
+          </a:effectRef>
+          <a:fontRef idx="minor">
+            <a:schemeClr val="lt1"/>
+          </a:fontRef>
+        </p:style>
+        <p:txBody>
+          <a:bodyPr rtlCol="0" anchor="ctr"/>
+          <a:lstStyle/>
+          <a:p>
+            <a:pPr algn="ctr"/>
+          </a:p>
+        </p:txBody>
+      </p:sp>
+      <p:sp>
+        <p:nvSpPr>
+          <p:cNvPr id="4" name="headline"/>
+          <p:cNvSpPr txBox="1"/>
+          <p:nvPr/>
+        </p:nvSpPr>
+        <p:spPr>
+          <a:xfrm>
+            <a:off x="666750" y="857250"/>
+            <a:ext cx="6096000" cy="3238500"/>
+          </a:xfrm>
+          <a:prstGeom prst="rect">
+            <a:avLst/>
+          </a:prstGeom>
+          <a:noFill/>
+        </p:spPr>
+        <p:txBody>
+          <a:bodyPr wrap="square" lIns="0" rIns="0" tIns="0" bIns="0" anchor="t">
+            <a:spAutoFit/>
+          </a:bodyPr>
+          <a:lstStyle/>
+          <a:p>
+            <a:pPr algn="l">
+              <a:lnSpc>
+                <a:spcPct val="105000"/>
+              </a:lnSpc>
+            </a:pPr>
+            <a:r>
+              <a:rPr sz="4950" b="1">
+                <a:solidFill>
+                  <a:srgbClr val="F4F1EA"/>
+                </a:solidFill>
+                <a:latin typeface="Montserrat"/>
+              </a:rPr>
+              <a:t>Read the biology, with a mentor beside you</a:t>
+            </a:r>
+          </a:p>
+        </p:txBody>
+      </p:sp>
+    </p:spTree>
+  </p:cSld>
+  <p:clrMapOvr>
+    <a:masterClrMapping/>
+  </p:clrMapOvr>
+</p:sld>
+</file>
+
+<file path=ppt/slides/slide6.xml><?xml version="1.0" encoding="utf-8"?>
+<p:sld xmlns:a="http://schemas.openxmlformats.org/drawingml/2006/main" xmlns:p="http://schemas.openxmlformats.org/presentationml/2006/main" xmlns:r="http://schemas.openxmlformats.org/officeDocument/2006/relationships">
+  <p:cSld>
+    <p:spTree>
+      <p:nvGrpSpPr>
+        <p:cNvPr id="1" name=""/>
+        <p:cNvGrpSpPr/>
+        <p:nvPr/>
+      </p:nvGrpSpPr>
+      <p:grpSpPr/>
+      <p:pic>
+        <p:nvPicPr>
+          <p:cNvPr id="2" name="photo PXL_20251022_172210012" descr="image.jpg"/>
+          <p:cNvPicPr>
+            <a:picLocks noChangeAspect="1"/>
+          </p:cNvPicPr>
+          <p:nvPr/>
+        </p:nvPicPr>
+        <p:blipFill>
+          <a:blip r:embed="rId3"/>
+          <a:stretch>
+            <a:fillRect/>
+          </a:stretch>
+        </p:blipFill>
+        <p:spPr>
+          <a:xfrm>
+            <a:off x="0" y="0"/>
+            <a:ext cx="10287000" cy="12858750"/>
+          </a:xfrm>
+          <a:prstGeom prst="rect">
+            <a:avLst/>
+          </a:prstGeom>
+        </p:spPr>
+      </p:pic>
+      <p:sp>
+        <p:nvSpPr>
+          <p:cNvPr id="3" name="green box"/>
+          <p:cNvSpPr/>
+          <p:nvPr/>
+        </p:nvSpPr>
+        <p:spPr>
+          <a:xfrm>
+            <a:off x="857250" y="7048500"/>
+            <a:ext cx="8572500" cy="5143500"/>
+          </a:xfrm>
+          <a:prstGeom prst="rect">
+            <a:avLst/>
+          </a:prstGeom>
+          <a:solidFill>
+            <a:srgbClr val="156826"/>
+          </a:solidFill>
+          <a:ln>
+            <a:noFill/>
+          </a:ln>
+          <a:effectLst/>
+        </p:spPr>
+        <p:style>
+          <a:lnRef idx="1">
+            <a:schemeClr val="accent1"/>
+          </a:lnRef>
+          <a:fillRef idx="3">
+            <a:schemeClr val="accent1"/>
+          </a:fillRef>
+          <a:effectRef idx="2">
+            <a:schemeClr val="accent1"/>
+          </a:effectRef>
+          <a:fontRef idx="minor">
+            <a:schemeClr val="lt1"/>
+          </a:fontRef>
+        </p:style>
+        <p:txBody>
+          <a:bodyPr rtlCol="0" anchor="ctr"/>
+          <a:lstStyle/>
+          <a:p>
+            <a:pPr algn="ctr"/>
+          </a:p>
+        </p:txBody>
+      </p:sp>
+      <p:sp>
+        <p:nvSpPr>
+          <p:cNvPr id="4" name="title"/>
+          <p:cNvSpPr txBox="1"/>
+          <p:nvPr/>
+        </p:nvSpPr>
+        <p:spPr>
+          <a:xfrm>
+            <a:off x="1428750" y="7524750"/>
+            <a:ext cx="7620000" cy="762000"/>
+          </a:xfrm>
+          <a:prstGeom prst="rect">
+            <a:avLst/>
+          </a:prstGeom>
+          <a:noFill/>
+        </p:spPr>
+        <p:txBody>
+          <a:bodyPr wrap="square" lIns="0" rIns="0" tIns="0" bIns="0" anchor="t">
+            <a:spAutoFit/>
+          </a:bodyPr>
+          <a:lstStyle/>
+          <a:p>
+            <a:pPr algn="l">
+              <a:lnSpc>
+                <a:spcPct val="105000"/>
+              </a:lnSpc>
+            </a:pPr>
+            <a:r>
+              <a:rPr sz="4350" b="1">
+                <a:solidFill>
+                  <a:srgbClr val="F4F1EA"/>
+                </a:solidFill>
+                <a:latin typeface="Montserrat"/>
+              </a:rPr>
+              <a:t>Accelerator Workshop</a:t>
+            </a:r>
+          </a:p>
+        </p:txBody>
+      </p:sp>
+      <p:sp>
+        <p:nvSpPr>
+          <p:cNvPr id="5" name="place"/>
+          <p:cNvSpPr txBox="1"/>
+          <p:nvPr/>
+        </p:nvSpPr>
+        <p:spPr>
+          <a:xfrm>
+            <a:off x="1447800" y="8524875"/>
+            <a:ext cx="7239000" cy="571500"/>
+          </a:xfrm>
+          <a:prstGeom prst="rect">
+            <a:avLst/>
+          </a:prstGeom>
+          <a:noFill/>
+        </p:spPr>
+        <p:txBody>
+          <a:bodyPr wrap="square" lIns="0" rIns="0" tIns="0" bIns="0" anchor="t">
+            <a:spAutoFit/>
+          </a:bodyPr>
+          <a:lstStyle/>
+          <a:p>
+            <a:pPr algn="l">
+              <a:lnSpc>
+                <a:spcPct val="105000"/>
+              </a:lnSpc>
+            </a:pPr>
+            <a:r>
+              <a:rPr sz="3300" b="0">
+                <a:solidFill>
+                  <a:srgbClr val="F4F1EA"/>
+                </a:solidFill>
+                <a:latin typeface="Source Sans 3"/>
+              </a:rPr>
+              <a:t>Heredia, Costa Rica</a:t>
+            </a:r>
+          </a:p>
+        </p:txBody>
+      </p:sp>
+      <p:sp>
+        <p:nvSpPr>
+          <p:cNvPr id="6" name="dates"/>
+          <p:cNvSpPr txBox="1"/>
+          <p:nvPr/>
+        </p:nvSpPr>
+        <p:spPr>
+          <a:xfrm>
+            <a:off x="1447800" y="9096375"/>
+            <a:ext cx="7239000" cy="571500"/>
+          </a:xfrm>
+          <a:prstGeom prst="rect">
+            <a:avLst/>
+          </a:prstGeom>
+          <a:noFill/>
+        </p:spPr>
+        <p:txBody>
+          <a:bodyPr wrap="square" lIns="0" rIns="0" tIns="0" bIns="0" anchor="t">
+            <a:spAutoFit/>
+          </a:bodyPr>
+          <a:lstStyle/>
+          <a:p>
+            <a:pPr algn="l">
+              <a:lnSpc>
+                <a:spcPct val="105000"/>
+              </a:lnSpc>
+            </a:pPr>
+            <a:r>
+              <a:rPr sz="3300" b="0">
+                <a:solidFill>
+                  <a:srgbClr val="F4F1EA"/>
+                </a:solidFill>
+                <a:latin typeface="Source Sans 3"/>
+              </a:rPr>
+              <a:t>January 18–29, 2027</a:t>
+            </a:r>
+          </a:p>
+        </p:txBody>
+      </p:sp>
+      <p:sp>
+        <p:nvSpPr>
+          <p:cNvPr id="7" name="cta"/>
+          <p:cNvSpPr txBox="1"/>
+          <p:nvPr/>
+        </p:nvSpPr>
+        <p:spPr>
+          <a:xfrm>
+            <a:off x="1428750" y="10525125"/>
+            <a:ext cx="5524500" cy="666750"/>
+          </a:xfrm>
+          <a:prstGeom prst="rect">
+            <a:avLst/>
+          </a:prstGeom>
+          <a:noFill/>
+        </p:spPr>
+        <p:txBody>
+          <a:bodyPr wrap="square" lIns="0" rIns="0" tIns="0" bIns="0" anchor="t">
+            <a:spAutoFit/>
+          </a:bodyPr>
+          <a:lstStyle/>
+          <a:p>
+            <a:pPr algn="l">
+              <a:lnSpc>
+                <a:spcPct val="105000"/>
+              </a:lnSpc>
+            </a:pPr>
+            <a:r>
+              <a:rPr sz="3600" b="1">
+                <a:solidFill>
+                  <a:srgbClr val="F4F1EA"/>
+                </a:solidFill>
+                <a:latin typeface="Montserrat"/>
+              </a:rPr>
+              <a:t>Register, link in bio</a:t>
+            </a:r>
+          </a:p>
+        </p:txBody>
+      </p:sp>
+      <p:pic>
+        <p:nvPicPr>
+          <p:cNvPr id="8" name="logo" descr="image.png"/>
+          <p:cNvPicPr>
+            <a:picLocks noChangeAspect="1"/>
+          </p:cNvPicPr>
+          <p:nvPr/>
+        </p:nvPicPr>
+        <p:blipFill>
+          <a:blip r:embed="rId4"/>
+          <a:stretch>
+            <a:fillRect/>
+          </a:stretch>
+        </p:blipFill>
+        <p:spPr>
+          <a:xfrm>
+            <a:off x="7524750" y="10287000"/>
+            <a:ext cx="1619250" cy="1619250"/>
           </a:xfrm>
           <a:prstGeom prst="rect">
             <a:avLst/>
@@ -4337,4 +5199,324 @@
   </a:objectDefaults>
   <a:extraClrSchemeLst/>
 </a:theme>
+</file>
+
+<file path=ppt/theme/theme2.xml><?xml version="1.0" encoding="utf-8"?>
+<a:theme xmlns:a="http://schemas.openxmlformats.org/drawingml/2006/main" name="Office Theme">
+  <a:themeElements>
+    <a:clrScheme name="Office">
+      <a:dk1>
+        <a:sysClr val="windowText" lastClr="000000"/>
+      </a:dk1>
+      <a:lt1>
+        <a:sysClr val="window" lastClr="FFFFFF"/>
+      </a:lt1>
+      <a:dk2>
+        <a:srgbClr val="1F497D"/>
+      </a:dk2>
+      <a:lt2>
+        <a:srgbClr val="EEECE1"/>
+      </a:lt2>
+      <a:accent1>
+        <a:srgbClr val="4F81BD"/>
+      </a:accent1>
+      <a:accent2>
+        <a:srgbClr val="C0504D"/>
+      </a:accent2>
+      <a:accent3>
+        <a:srgbClr val="9BBB59"/>
+      </a:accent3>
+      <a:accent4>
+        <a:srgbClr val="8064A2"/>
+      </a:accent4>
+      <a:accent5>
+        <a:srgbClr val="4BACC6"/>
+      </a:accent5>
+      <a:accent6>
+        <a:srgbClr val="F79646"/>
+      </a:accent6>
+      <a:hlink>
+        <a:srgbClr val="0000FF"/>
+      </a:hlink>
+      <a:folHlink>
+        <a:srgbClr val="800080"/>
+      </a:folHlink>
+    </a:clrScheme>
+    <a:fontScheme name="Office">
+      <a:majorFont>
+        <a:latin typeface="Calibri"/>
+        <a:ea typeface=""/>
+        <a:cs typeface=""/>
+        <a:font script="Jpan" typeface="ＭＳ Ｐゴシック"/>
+        <a:font script="Hang" typeface="맑은 고딕"/>
+        <a:font script="Hans" typeface="宋体"/>
+        <a:font script="Hant" typeface="新細明體"/>
+        <a:font script="Arab" typeface="Times New Roman"/>
+        <a:font script="Hebr" typeface="Times New Roman"/>
+        <a:font script="Thai" typeface="Angsana New"/>
+        <a:font script="Ethi" typeface="Nyala"/>
+        <a:font script="Beng" typeface="Vrinda"/>
+        <a:font script="Gujr" typeface="Shruti"/>
+        <a:font script="Khmr" typeface="MoolBoran"/>
+        <a:font script="Knda" typeface="Tunga"/>
+        <a:font script="Guru" typeface="Raavi"/>
+        <a:font script="Cans" typeface="Euphemia"/>
+        <a:font script="Cher" typeface="Plantagenet Cherokee"/>
+        <a:font script="Yiii" typeface="Microsoft Yi Baiti"/>
+        <a:font script="Tibt" typeface="Microsoft Himalaya"/>
+        <a:font script="Thaa" typeface="MV Boli"/>
+        <a:font script="Deva" typeface="Mangal"/>
+        <a:font script="Telu" typeface="Gautami"/>
+        <a:font script="Taml" typeface="Latha"/>
+        <a:font script="Syrc" typeface="Estrangelo Edessa"/>
+        <a:font script="Orya" typeface="Kalinga"/>
+        <a:font script="Mlym" typeface="Kartika"/>
+        <a:font script="Laoo" typeface="DokChampa"/>
+        <a:font script="Sinh" typeface="Iskoola Pota"/>
+        <a:font script="Mong" typeface="Mongolian Baiti"/>
+        <a:font script="Viet" typeface="Times New Roman"/>
+        <a:font script="Uigh" typeface="Microsoft Uighur"/>
+        <a:font script="Geor" typeface="Sylfaen"/>
+      </a:majorFont>
+      <a:minorFont>
+        <a:latin typeface="Calibri"/>
+        <a:ea typeface=""/>
+        <a:cs typeface=""/>
+        <a:font script="Jpan" typeface="ＭＳ Ｐゴシック"/>
+        <a:font script="Hang" typeface="맑은 고딕"/>
+        <a:font script="Hans" typeface="宋体"/>
+        <a:font script="Hant" typeface="新細明體"/>
+        <a:font script="Arab" typeface="Arial"/>
+        <a:font script="Hebr" typeface="Arial"/>
+        <a:font script="Thai" typeface="Cordia New"/>
+        <a:font script="Ethi" typeface="Nyala"/>
+        <a:font script="Beng" typeface="Vrinda"/>
+        <a:font script="Gujr" typeface="Shruti"/>
+        <a:font script="Khmr" typeface="DaunPenh"/>
+        <a:font script="Knda" typeface="Tunga"/>
+        <a:font script="Guru" typeface="Raavi"/>
+        <a:font script="Cans" typeface="Euphemia"/>
+        <a:font script="Cher" typeface="Plantagenet Cherokee"/>
+        <a:font script="Yiii" typeface="Microsoft Yi Baiti"/>
+        <a:font script="Tibt" typeface="Microsoft Himalaya"/>
+        <a:font script="Thaa" typeface="MV Boli"/>
+        <a:font script="Deva" typeface="Mangal"/>
+        <a:font script="Telu" typeface="Gautami"/>
+        <a:font script="Taml" typeface="Latha"/>
+        <a:font script="Syrc" typeface="Estrangelo Edessa"/>
+        <a:font script="Orya" typeface="Kalinga"/>
+        <a:font script="Mlym" typeface="Kartika"/>
+        <a:font script="Laoo" typeface="DokChampa"/>
+        <a:font script="Sinh" typeface="Iskoola Pota"/>
+        <a:font script="Mong" typeface="Mongolian Baiti"/>
+        <a:font script="Viet" typeface="Arial"/>
+        <a:font script="Uigh" typeface="Microsoft Uighur"/>
+        <a:font script="Geor" typeface="Sylfaen"/>
+      </a:minorFont>
+    </a:fontScheme>
+    <a:fmtScheme name="Office">
+      <a:fillStyleLst>
+        <a:solidFill>
+          <a:schemeClr val="phClr"/>
+        </a:solidFill>
+        <a:gradFill rotWithShape="1">
+          <a:gsLst>
+            <a:gs pos="0">
+              <a:schemeClr val="phClr">
+                <a:tint val="50000"/>
+                <a:satMod val="300000"/>
+              </a:schemeClr>
+            </a:gs>
+            <a:gs pos="35000">
+              <a:schemeClr val="phClr">
+                <a:tint val="37000"/>
+                <a:satMod val="300000"/>
+              </a:schemeClr>
+            </a:gs>
+            <a:gs pos="100000">
+              <a:schemeClr val="phClr">
+                <a:tint val="15000"/>
+                <a:satMod val="350000"/>
+              </a:schemeClr>
+            </a:gs>
+          </a:gsLst>
+          <a:lin ang="16200000" scaled="1"/>
+        </a:gradFill>
+        <a:gradFill rotWithShape="1">
+          <a:gsLst>
+            <a:gs pos="0">
+              <a:schemeClr val="phClr">
+                <a:tint val="100000"/>
+                <a:shade val="100000"/>
+                <a:satMod val="130000"/>
+              </a:schemeClr>
+            </a:gs>
+            <a:gs pos="100000">
+              <a:schemeClr val="phClr">
+                <a:tint val="50000"/>
+                <a:shade val="100000"/>
+                <a:satMod val="350000"/>
+              </a:schemeClr>
+            </a:gs>
+          </a:gsLst>
+          <a:lin ang="16200000" scaled="0"/>
+        </a:gradFill>
+      </a:fillStyleLst>
+      <a:lnStyleLst>
+        <a:ln w="9525" cap="flat" cmpd="sng" algn="ctr">
+          <a:solidFill>
+            <a:schemeClr val="phClr">
+              <a:shade val="95000"/>
+              <a:satMod val="105000"/>
+            </a:schemeClr>
+          </a:solidFill>
+          <a:prstDash val="solid"/>
+        </a:ln>
+        <a:ln w="25400" cap="flat" cmpd="sng" algn="ctr">
+          <a:solidFill>
+            <a:schemeClr val="phClr"/>
+          </a:solidFill>
+          <a:prstDash val="solid"/>
+        </a:ln>
+        <a:ln w="38100" cap="flat" cmpd="sng" algn="ctr">
+          <a:solidFill>
+            <a:schemeClr val="phClr"/>
+          </a:solidFill>
+          <a:prstDash val="solid"/>
+        </a:ln>
+      </a:lnStyleLst>
+      <a:effectStyleLst>
+        <a:effectStyle>
+          <a:effectLst>
+            <a:outerShdw blurRad="40000" dist="20000" dir="5400000" rotWithShape="0">
+              <a:srgbClr val="000000">
+                <a:alpha val="38000"/>
+              </a:srgbClr>
+            </a:outerShdw>
+          </a:effectLst>
+        </a:effectStyle>
+        <a:effectStyle>
+          <a:effectLst>
+            <a:outerShdw blurRad="40000" dist="23000" dir="5400000" rotWithShape="0">
+              <a:srgbClr val="000000">
+                <a:alpha val="35000"/>
+              </a:srgbClr>
+            </a:outerShdw>
+          </a:effectLst>
+        </a:effectStyle>
+        <a:effectStyle>
+          <a:effectLst>
+            <a:outerShdw blurRad="40000" dist="23000" dir="5400000" rotWithShape="0">
+              <a:srgbClr val="000000">
+                <a:alpha val="35000"/>
+              </a:srgbClr>
+            </a:outerShdw>
+          </a:effectLst>
+          <a:scene3d>
+            <a:camera prst="orthographicFront">
+              <a:rot lat="0" lon="0" rev="0"/>
+            </a:camera>
+            <a:lightRig rig="threePt" dir="t">
+              <a:rot lat="0" lon="0" rev="1200000"/>
+            </a:lightRig>
+          </a:scene3d>
+          <a:sp3d>
+            <a:bevelT w="63500" h="25400"/>
+          </a:sp3d>
+        </a:effectStyle>
+      </a:effectStyleLst>
+      <a:bgFillStyleLst>
+        <a:solidFill>
+          <a:schemeClr val="phClr"/>
+        </a:solidFill>
+        <a:gradFill rotWithShape="1">
+          <a:gsLst>
+            <a:gs pos="0">
+              <a:schemeClr val="phClr">
+                <a:tint val="40000"/>
+                <a:satMod val="350000"/>
+              </a:schemeClr>
+            </a:gs>
+            <a:gs pos="40000">
+              <a:schemeClr val="phClr">
+                <a:tint val="45000"/>
+                <a:shade val="99000"/>
+                <a:satMod val="350000"/>
+              </a:schemeClr>
+            </a:gs>
+            <a:gs pos="100000">
+              <a:schemeClr val="phClr">
+                <a:shade val="20000"/>
+                <a:satMod val="255000"/>
+              </a:schemeClr>
+            </a:gs>
+          </a:gsLst>
+          <a:path path="circle">
+            <a:fillToRect l="50000" t="-80000" r="50000" b="180000"/>
+          </a:path>
+        </a:gradFill>
+        <a:gradFill rotWithShape="1">
+          <a:gsLst>
+            <a:gs pos="0">
+              <a:schemeClr val="phClr">
+                <a:tint val="80000"/>
+                <a:satMod val="300000"/>
+              </a:schemeClr>
+            </a:gs>
+            <a:gs pos="100000">
+              <a:schemeClr val="phClr">
+                <a:shade val="30000"/>
+                <a:satMod val="200000"/>
+              </a:schemeClr>
+            </a:gs>
+          </a:gsLst>
+          <a:path path="circle">
+            <a:fillToRect l="50000" t="50000" r="50000" b="50000"/>
+          </a:path>
+        </a:gradFill>
+      </a:bgFillStyleLst>
+    </a:fmtScheme>
+  </a:themeElements>
+  <a:objectDefaults>
+    <a:spDef>
+      <a:spPr/>
+      <a:bodyPr/>
+      <a:lstStyle/>
+      <a:style>
+        <a:lnRef idx="1">
+          <a:schemeClr val="accent1"/>
+        </a:lnRef>
+        <a:fillRef idx="3">
+          <a:schemeClr val="accent1"/>
+        </a:fillRef>
+        <a:effectRef idx="2">
+          <a:schemeClr val="accent1"/>
+        </a:effectRef>
+        <a:fontRef idx="minor">
+          <a:schemeClr val="lt1"/>
+        </a:fontRef>
+      </a:style>
+    </a:spDef>
+    <a:lnDef>
+      <a:spPr/>
+      <a:bodyPr/>
+      <a:lstStyle/>
+      <a:style>
+        <a:lnRef idx="2">
+          <a:schemeClr val="accent1"/>
+        </a:lnRef>
+        <a:fillRef idx="0">
+          <a:schemeClr val="accent1"/>
+        </a:fillRef>
+        <a:effectRef idx="1">
+          <a:schemeClr val="accent1"/>
+        </a:effectRef>
+        <a:fontRef idx="minor">
+          <a:schemeClr val="tx1"/>
+        </a:fontRef>
+      </a:style>
+    </a:lnDef>
+  </a:objectDefaults>
+  <a:extraClrSchemeLst/>
+</a:theme>
 </file>